--- a/assets/promo_adultos.pptx
+++ b/assets/promo_adultos.pptx
@@ -6,18 +6,18 @@
     <p:sldMasterId id="2147483660" r:id="rId2"/>
   </p:sldMasterIdLst>
   <p:notesMasterIdLst>
-    <p:notesMasterId r:id="rId39"/>
+    <p:notesMasterId r:id="rId12"/>
   </p:notesMasterIdLst>
   <p:sldIdLst>
-    <p:sldId id="256" r:id="rId11"/>
-    <p:sldId id="257" r:id="rId12"/>
-    <p:sldId id="258" r:id="rId13"/>
-    <p:sldId id="259" r:id="rId14"/>
-    <p:sldId id="260" r:id="rId15"/>
-    <p:sldId id="261" r:id="rId16"/>
-    <p:sldId id="262" r:id="rId17"/>
-    <p:sldId id="263" r:id="rId18"/>
-    <p:sldId id="264" r:id="rId19"/>
+    <p:sldId id="256" r:id="rId3"/>
+    <p:sldId id="257" r:id="rId4"/>
+    <p:sldId id="258" r:id="rId5"/>
+    <p:sldId id="259" r:id="rId6"/>
+    <p:sldId id="260" r:id="rId7"/>
+    <p:sldId id="261" r:id="rId8"/>
+    <p:sldId id="262" r:id="rId9"/>
+    <p:sldId id="263" r:id="rId10"/>
+    <p:sldId id="264" r:id="rId11"/>
   </p:sldIdLst>
   <p:sldSz cx="12192000" cy="6858000"/>
   <p:notesSz cx="6858000" cy="9144000"/>
@@ -598,7 +598,7 @@
           <a:p>
             <a:fld id="{2FE789DD-B456-4103-856E-94F62313C9D6}" type="datetimeFigureOut">
               <a:rPr lang="pt-BR" smtClean="0"/>
-              <a:t>24/08/2026</a:t>
+              <a:t>26/10/2026</a:t>
             </a:fld>
             <a:endParaRPr lang="pt-BR"/>
           </a:p>
@@ -887,7 +887,7 @@
           <p:cNvPr id="2" name="Título 1">
             <a:extLst>
               <a:ext uri="{FF2B5EF4-FFF2-40B4-BE49-F238E27FC236}">
-                <a16:creationId xmlns:a16="http://schemas.microsoft.com/office/drawing/2014/main" xmlns="" id="{5D7693DF-F4A9-4F0B-AAE8-9E0E43844AFC}"/>
+                <a16:creationId xmlns="" xmlns:a16="http://schemas.microsoft.com/office/drawing/2014/main" id="{5D7693DF-F4A9-4F0B-AAE8-9E0E43844AFC}"/>
               </a:ext>
             </a:extLst>
           </p:cNvPr>
@@ -924,7 +924,7 @@
           <p:cNvPr id="3" name="Subtítulo 2">
             <a:extLst>
               <a:ext uri="{FF2B5EF4-FFF2-40B4-BE49-F238E27FC236}">
-                <a16:creationId xmlns:a16="http://schemas.microsoft.com/office/drawing/2014/main" xmlns="" id="{9E0EAB38-44F5-42E5-87A8-AACEA25664EB}"/>
+                <a16:creationId xmlns="" xmlns:a16="http://schemas.microsoft.com/office/drawing/2014/main" id="{9E0EAB38-44F5-42E5-87A8-AACEA25664EB}"/>
               </a:ext>
             </a:extLst>
           </p:cNvPr>
@@ -994,7 +994,7 @@
           <p:cNvPr id="4" name="Espaço Reservado para Data 3">
             <a:extLst>
               <a:ext uri="{FF2B5EF4-FFF2-40B4-BE49-F238E27FC236}">
-                <a16:creationId xmlns:a16="http://schemas.microsoft.com/office/drawing/2014/main" xmlns="" id="{EEBFC15F-DC7A-4EB0-BEBB-1CC5B7B15494}"/>
+                <a16:creationId xmlns="" xmlns:a16="http://schemas.microsoft.com/office/drawing/2014/main" id="{EEBFC15F-DC7A-4EB0-BEBB-1CC5B7B15494}"/>
               </a:ext>
             </a:extLst>
           </p:cNvPr>
@@ -1012,7 +1012,7 @@
           <a:p>
             <a:fld id="{DF13A7C9-E623-47E9-BF8C-18B1142F2EF1}" type="datetimeFigureOut">
               <a:rPr lang="pt-BR" smtClean="0"/>
-              <a:t>24/08/2026</a:t>
+              <a:t>26/10/2026</a:t>
             </a:fld>
             <a:endParaRPr lang="pt-BR"/>
           </a:p>
@@ -1023,7 +1023,7 @@
           <p:cNvPr id="5" name="Espaço Reservado para Rodapé 4">
             <a:extLst>
               <a:ext uri="{FF2B5EF4-FFF2-40B4-BE49-F238E27FC236}">
-                <a16:creationId xmlns:a16="http://schemas.microsoft.com/office/drawing/2014/main" xmlns="" id="{C06DA521-F074-4898-BF7E-2CAD3A445A8F}"/>
+                <a16:creationId xmlns="" xmlns:a16="http://schemas.microsoft.com/office/drawing/2014/main" id="{C06DA521-F074-4898-BF7E-2CAD3A445A8F}"/>
               </a:ext>
             </a:extLst>
           </p:cNvPr>
@@ -1048,7 +1048,7 @@
           <p:cNvPr id="6" name="Espaço Reservado para Número de Slide 5">
             <a:extLst>
               <a:ext uri="{FF2B5EF4-FFF2-40B4-BE49-F238E27FC236}">
-                <a16:creationId xmlns:a16="http://schemas.microsoft.com/office/drawing/2014/main" xmlns="" id="{14238AAE-AC7C-4D49-A82E-267E22515B84}"/>
+                <a16:creationId xmlns="" xmlns:a16="http://schemas.microsoft.com/office/drawing/2014/main" id="{14238AAE-AC7C-4D49-A82E-267E22515B84}"/>
               </a:ext>
             </a:extLst>
           </p:cNvPr>
@@ -1107,7 +1107,7 @@
           <p:cNvPr id="2" name="Título 1">
             <a:extLst>
               <a:ext uri="{FF2B5EF4-FFF2-40B4-BE49-F238E27FC236}">
-                <a16:creationId xmlns:a16="http://schemas.microsoft.com/office/drawing/2014/main" xmlns="" id="{C82D172F-92AE-40A1-9E61-E06F0EB54DE3}"/>
+                <a16:creationId xmlns="" xmlns:a16="http://schemas.microsoft.com/office/drawing/2014/main" id="{C82D172F-92AE-40A1-9E61-E06F0EB54DE3}"/>
               </a:ext>
             </a:extLst>
           </p:cNvPr>
@@ -1135,7 +1135,7 @@
           <p:cNvPr id="3" name="Espaço Reservado para Texto Vertical 2">
             <a:extLst>
               <a:ext uri="{FF2B5EF4-FFF2-40B4-BE49-F238E27FC236}">
-                <a16:creationId xmlns:a16="http://schemas.microsoft.com/office/drawing/2014/main" xmlns="" id="{CC9D0A08-166D-4402-A266-32845CE6E354}"/>
+                <a16:creationId xmlns="" xmlns:a16="http://schemas.microsoft.com/office/drawing/2014/main" id="{CC9D0A08-166D-4402-A266-32845CE6E354}"/>
               </a:ext>
             </a:extLst>
           </p:cNvPr>
@@ -1192,7 +1192,7 @@
           <p:cNvPr id="4" name="Espaço Reservado para Data 3">
             <a:extLst>
               <a:ext uri="{FF2B5EF4-FFF2-40B4-BE49-F238E27FC236}">
-                <a16:creationId xmlns:a16="http://schemas.microsoft.com/office/drawing/2014/main" xmlns="" id="{A98A9E39-166E-4749-BA94-72E636A62AF1}"/>
+                <a16:creationId xmlns="" xmlns:a16="http://schemas.microsoft.com/office/drawing/2014/main" id="{A98A9E39-166E-4749-BA94-72E636A62AF1}"/>
               </a:ext>
             </a:extLst>
           </p:cNvPr>
@@ -1210,7 +1210,7 @@
           <a:p>
             <a:fld id="{DF13A7C9-E623-47E9-BF8C-18B1142F2EF1}" type="datetimeFigureOut">
               <a:rPr lang="pt-BR" smtClean="0"/>
-              <a:t>24/08/2026</a:t>
+              <a:t>26/10/2026</a:t>
             </a:fld>
             <a:endParaRPr lang="pt-BR"/>
           </a:p>
@@ -1221,7 +1221,7 @@
           <p:cNvPr id="5" name="Espaço Reservado para Rodapé 4">
             <a:extLst>
               <a:ext uri="{FF2B5EF4-FFF2-40B4-BE49-F238E27FC236}">
-                <a16:creationId xmlns:a16="http://schemas.microsoft.com/office/drawing/2014/main" xmlns="" id="{3BFD5E80-1F9D-421B-B410-00F80A1EE941}"/>
+                <a16:creationId xmlns="" xmlns:a16="http://schemas.microsoft.com/office/drawing/2014/main" id="{3BFD5E80-1F9D-421B-B410-00F80A1EE941}"/>
               </a:ext>
             </a:extLst>
           </p:cNvPr>
@@ -1246,7 +1246,7 @@
           <p:cNvPr id="6" name="Espaço Reservado para Número de Slide 5">
             <a:extLst>
               <a:ext uri="{FF2B5EF4-FFF2-40B4-BE49-F238E27FC236}">
-                <a16:creationId xmlns:a16="http://schemas.microsoft.com/office/drawing/2014/main" xmlns="" id="{FDF84E03-26E0-416C-8554-98855E690244}"/>
+                <a16:creationId xmlns="" xmlns:a16="http://schemas.microsoft.com/office/drawing/2014/main" id="{FDF84E03-26E0-416C-8554-98855E690244}"/>
               </a:ext>
             </a:extLst>
           </p:cNvPr>
@@ -1305,7 +1305,7 @@
           <p:cNvPr id="2" name="Título Vertical 1">
             <a:extLst>
               <a:ext uri="{FF2B5EF4-FFF2-40B4-BE49-F238E27FC236}">
-                <a16:creationId xmlns:a16="http://schemas.microsoft.com/office/drawing/2014/main" xmlns="" id="{9D45F066-5B8A-48FC-9B33-AE0EE929F054}"/>
+                <a16:creationId xmlns="" xmlns:a16="http://schemas.microsoft.com/office/drawing/2014/main" id="{9D45F066-5B8A-48FC-9B33-AE0EE929F054}"/>
               </a:ext>
             </a:extLst>
           </p:cNvPr>
@@ -1338,7 +1338,7 @@
           <p:cNvPr id="3" name="Espaço Reservado para Texto Vertical 2">
             <a:extLst>
               <a:ext uri="{FF2B5EF4-FFF2-40B4-BE49-F238E27FC236}">
-                <a16:creationId xmlns:a16="http://schemas.microsoft.com/office/drawing/2014/main" xmlns="" id="{9DCECA87-69D0-4051-8163-CBA414B017CD}"/>
+                <a16:creationId xmlns="" xmlns:a16="http://schemas.microsoft.com/office/drawing/2014/main" id="{9DCECA87-69D0-4051-8163-CBA414B017CD}"/>
               </a:ext>
             </a:extLst>
           </p:cNvPr>
@@ -1400,7 +1400,7 @@
           <p:cNvPr id="4" name="Espaço Reservado para Data 3">
             <a:extLst>
               <a:ext uri="{FF2B5EF4-FFF2-40B4-BE49-F238E27FC236}">
-                <a16:creationId xmlns:a16="http://schemas.microsoft.com/office/drawing/2014/main" xmlns="" id="{52BDC7E5-655D-4405-AE2D-9A058DE76678}"/>
+                <a16:creationId xmlns="" xmlns:a16="http://schemas.microsoft.com/office/drawing/2014/main" id="{52BDC7E5-655D-4405-AE2D-9A058DE76678}"/>
               </a:ext>
             </a:extLst>
           </p:cNvPr>
@@ -1418,7 +1418,7 @@
           <a:p>
             <a:fld id="{DF13A7C9-E623-47E9-BF8C-18B1142F2EF1}" type="datetimeFigureOut">
               <a:rPr lang="pt-BR" smtClean="0"/>
-              <a:t>24/08/2026</a:t>
+              <a:t>26/10/2026</a:t>
             </a:fld>
             <a:endParaRPr lang="pt-BR"/>
           </a:p>
@@ -1429,7 +1429,7 @@
           <p:cNvPr id="5" name="Espaço Reservado para Rodapé 4">
             <a:extLst>
               <a:ext uri="{FF2B5EF4-FFF2-40B4-BE49-F238E27FC236}">
-                <a16:creationId xmlns:a16="http://schemas.microsoft.com/office/drawing/2014/main" xmlns="" id="{D367C9E1-79EE-4966-AE6F-17B93D9D55AB}"/>
+                <a16:creationId xmlns="" xmlns:a16="http://schemas.microsoft.com/office/drawing/2014/main" id="{D367C9E1-79EE-4966-AE6F-17B93D9D55AB}"/>
               </a:ext>
             </a:extLst>
           </p:cNvPr>
@@ -1454,7 +1454,7 @@
           <p:cNvPr id="6" name="Espaço Reservado para Número de Slide 5">
             <a:extLst>
               <a:ext uri="{FF2B5EF4-FFF2-40B4-BE49-F238E27FC236}">
-                <a16:creationId xmlns:a16="http://schemas.microsoft.com/office/drawing/2014/main" xmlns="" id="{BDA06A84-6E45-487F-8876-E535A1762275}"/>
+                <a16:creationId xmlns="" xmlns:a16="http://schemas.microsoft.com/office/drawing/2014/main" id="{BDA06A84-6E45-487F-8876-E535A1762275}"/>
               </a:ext>
             </a:extLst>
           </p:cNvPr>
@@ -1513,7 +1513,7 @@
           <p:cNvPr id="2" name="Título 1">
             <a:extLst>
               <a:ext uri="{FF2B5EF4-FFF2-40B4-BE49-F238E27FC236}">
-                <a16:creationId xmlns="" xmlns:a16="http://schemas.microsoft.com/office/drawing/2014/main" id="{5D7693DF-F4A9-4F0B-AAE8-9E0E43844AFC}"/>
+                <a16:creationId xmlns:a16="http://schemas.microsoft.com/office/drawing/2014/main" xmlns="" id="{5D7693DF-F4A9-4F0B-AAE8-9E0E43844AFC}"/>
               </a:ext>
             </a:extLst>
           </p:cNvPr>
@@ -1550,7 +1550,7 @@
           <p:cNvPr id="3" name="Subtítulo 2">
             <a:extLst>
               <a:ext uri="{FF2B5EF4-FFF2-40B4-BE49-F238E27FC236}">
-                <a16:creationId xmlns="" xmlns:a16="http://schemas.microsoft.com/office/drawing/2014/main" id="{9E0EAB38-44F5-42E5-87A8-AACEA25664EB}"/>
+                <a16:creationId xmlns:a16="http://schemas.microsoft.com/office/drawing/2014/main" xmlns="" id="{9E0EAB38-44F5-42E5-87A8-AACEA25664EB}"/>
               </a:ext>
             </a:extLst>
           </p:cNvPr>
@@ -1620,7 +1620,7 @@
           <p:cNvPr id="4" name="Espaço Reservado para Data 3">
             <a:extLst>
               <a:ext uri="{FF2B5EF4-FFF2-40B4-BE49-F238E27FC236}">
-                <a16:creationId xmlns="" xmlns:a16="http://schemas.microsoft.com/office/drawing/2014/main" id="{EEBFC15F-DC7A-4EB0-BEBB-1CC5B7B15494}"/>
+                <a16:creationId xmlns:a16="http://schemas.microsoft.com/office/drawing/2014/main" xmlns="" id="{EEBFC15F-DC7A-4EB0-BEBB-1CC5B7B15494}"/>
               </a:ext>
             </a:extLst>
           </p:cNvPr>
@@ -1645,7 +1645,7 @@
                 </a:solidFill>
               </a:rPr>
               <a:pPr/>
-              <a:t>24/08/2026</a:t>
+              <a:t>26/10/2026</a:t>
             </a:fld>
             <a:endParaRPr lang="pt-BR">
               <a:solidFill>
@@ -1662,7 +1662,7 @@
           <p:cNvPr id="5" name="Espaço Reservado para Rodapé 4">
             <a:extLst>
               <a:ext uri="{FF2B5EF4-FFF2-40B4-BE49-F238E27FC236}">
-                <a16:creationId xmlns="" xmlns:a16="http://schemas.microsoft.com/office/drawing/2014/main" id="{C06DA521-F074-4898-BF7E-2CAD3A445A8F}"/>
+                <a16:creationId xmlns:a16="http://schemas.microsoft.com/office/drawing/2014/main" xmlns="" id="{C06DA521-F074-4898-BF7E-2CAD3A445A8F}"/>
               </a:ext>
             </a:extLst>
           </p:cNvPr>
@@ -1693,7 +1693,7 @@
           <p:cNvPr id="6" name="Espaço Reservado para Número de Slide 5">
             <a:extLst>
               <a:ext uri="{FF2B5EF4-FFF2-40B4-BE49-F238E27FC236}">
-                <a16:creationId xmlns="" xmlns:a16="http://schemas.microsoft.com/office/drawing/2014/main" id="{14238AAE-AC7C-4D49-A82E-267E22515B84}"/>
+                <a16:creationId xmlns:a16="http://schemas.microsoft.com/office/drawing/2014/main" xmlns="" id="{14238AAE-AC7C-4D49-A82E-267E22515B84}"/>
               </a:ext>
             </a:extLst>
           </p:cNvPr>
@@ -1765,7 +1765,7 @@
           <p:cNvPr id="2" name="Título 1">
             <a:extLst>
               <a:ext uri="{FF2B5EF4-FFF2-40B4-BE49-F238E27FC236}">
-                <a16:creationId xmlns="" xmlns:a16="http://schemas.microsoft.com/office/drawing/2014/main" id="{7FBDC090-8FD0-4A1C-8DE9-804389A94AA3}"/>
+                <a16:creationId xmlns:a16="http://schemas.microsoft.com/office/drawing/2014/main" xmlns="" id="{7FBDC090-8FD0-4A1C-8DE9-804389A94AA3}"/>
               </a:ext>
             </a:extLst>
           </p:cNvPr>
@@ -1793,7 +1793,7 @@
           <p:cNvPr id="3" name="Espaço Reservado para Conteúdo 2">
             <a:extLst>
               <a:ext uri="{FF2B5EF4-FFF2-40B4-BE49-F238E27FC236}">
-                <a16:creationId xmlns="" xmlns:a16="http://schemas.microsoft.com/office/drawing/2014/main" id="{6093E21E-854B-43DE-93CF-BAE354EB6E80}"/>
+                <a16:creationId xmlns:a16="http://schemas.microsoft.com/office/drawing/2014/main" xmlns="" id="{6093E21E-854B-43DE-93CF-BAE354EB6E80}"/>
               </a:ext>
             </a:extLst>
           </p:cNvPr>
@@ -1850,7 +1850,7 @@
           <p:cNvPr id="4" name="Espaço Reservado para Data 3">
             <a:extLst>
               <a:ext uri="{FF2B5EF4-FFF2-40B4-BE49-F238E27FC236}">
-                <a16:creationId xmlns="" xmlns:a16="http://schemas.microsoft.com/office/drawing/2014/main" id="{51A896D1-7525-4CFA-A6E7-50F54B58CB38}"/>
+                <a16:creationId xmlns:a16="http://schemas.microsoft.com/office/drawing/2014/main" xmlns="" id="{51A896D1-7525-4CFA-A6E7-50F54B58CB38}"/>
               </a:ext>
             </a:extLst>
           </p:cNvPr>
@@ -1875,7 +1875,7 @@
                 </a:solidFill>
               </a:rPr>
               <a:pPr/>
-              <a:t>24/08/2026</a:t>
+              <a:t>26/10/2026</a:t>
             </a:fld>
             <a:endParaRPr lang="pt-BR">
               <a:solidFill>
@@ -1892,7 +1892,7 @@
           <p:cNvPr id="5" name="Espaço Reservado para Rodapé 4">
             <a:extLst>
               <a:ext uri="{FF2B5EF4-FFF2-40B4-BE49-F238E27FC236}">
-                <a16:creationId xmlns="" xmlns:a16="http://schemas.microsoft.com/office/drawing/2014/main" id="{52C3688C-FE15-4776-93B6-C47D7E046349}"/>
+                <a16:creationId xmlns:a16="http://schemas.microsoft.com/office/drawing/2014/main" xmlns="" id="{52C3688C-FE15-4776-93B6-C47D7E046349}"/>
               </a:ext>
             </a:extLst>
           </p:cNvPr>
@@ -1923,7 +1923,7 @@
           <p:cNvPr id="6" name="Espaço Reservado para Número de Slide 5">
             <a:extLst>
               <a:ext uri="{FF2B5EF4-FFF2-40B4-BE49-F238E27FC236}">
-                <a16:creationId xmlns="" xmlns:a16="http://schemas.microsoft.com/office/drawing/2014/main" id="{A7258081-001C-46AB-B235-24B9B68DB29E}"/>
+                <a16:creationId xmlns:a16="http://schemas.microsoft.com/office/drawing/2014/main" xmlns="" id="{A7258081-001C-46AB-B235-24B9B68DB29E}"/>
               </a:ext>
             </a:extLst>
           </p:cNvPr>
@@ -1995,7 +1995,7 @@
           <p:cNvPr id="2" name="Título 1">
             <a:extLst>
               <a:ext uri="{FF2B5EF4-FFF2-40B4-BE49-F238E27FC236}">
-                <a16:creationId xmlns="" xmlns:a16="http://schemas.microsoft.com/office/drawing/2014/main" id="{B7F2B671-170F-4991-9B5D-B25A2C212FA9}"/>
+                <a16:creationId xmlns:a16="http://schemas.microsoft.com/office/drawing/2014/main" xmlns="" id="{B7F2B671-170F-4991-9B5D-B25A2C212FA9}"/>
               </a:ext>
             </a:extLst>
           </p:cNvPr>
@@ -2032,7 +2032,7 @@
           <p:cNvPr id="3" name="Espaço Reservado para Texto 2">
             <a:extLst>
               <a:ext uri="{FF2B5EF4-FFF2-40B4-BE49-F238E27FC236}">
-                <a16:creationId xmlns="" xmlns:a16="http://schemas.microsoft.com/office/drawing/2014/main" id="{46342B92-6224-4299-99C5-F6F238BFF893}"/>
+                <a16:creationId xmlns:a16="http://schemas.microsoft.com/office/drawing/2014/main" xmlns="" id="{46342B92-6224-4299-99C5-F6F238BFF893}"/>
               </a:ext>
             </a:extLst>
           </p:cNvPr>
@@ -2157,7 +2157,7 @@
           <p:cNvPr id="4" name="Espaço Reservado para Data 3">
             <a:extLst>
               <a:ext uri="{FF2B5EF4-FFF2-40B4-BE49-F238E27FC236}">
-                <a16:creationId xmlns="" xmlns:a16="http://schemas.microsoft.com/office/drawing/2014/main" id="{7B386812-6064-4075-BA26-E6B5F019389B}"/>
+                <a16:creationId xmlns:a16="http://schemas.microsoft.com/office/drawing/2014/main" xmlns="" id="{7B386812-6064-4075-BA26-E6B5F019389B}"/>
               </a:ext>
             </a:extLst>
           </p:cNvPr>
@@ -2182,7 +2182,7 @@
                 </a:solidFill>
               </a:rPr>
               <a:pPr/>
-              <a:t>24/08/2026</a:t>
+              <a:t>26/10/2026</a:t>
             </a:fld>
             <a:endParaRPr lang="pt-BR">
               <a:solidFill>
@@ -2199,7 +2199,7 @@
           <p:cNvPr id="5" name="Espaço Reservado para Rodapé 4">
             <a:extLst>
               <a:ext uri="{FF2B5EF4-FFF2-40B4-BE49-F238E27FC236}">
-                <a16:creationId xmlns="" xmlns:a16="http://schemas.microsoft.com/office/drawing/2014/main" id="{D4940B02-7C13-4D7C-9DBC-B84812DF5576}"/>
+                <a16:creationId xmlns:a16="http://schemas.microsoft.com/office/drawing/2014/main" xmlns="" id="{D4940B02-7C13-4D7C-9DBC-B84812DF5576}"/>
               </a:ext>
             </a:extLst>
           </p:cNvPr>
@@ -2230,7 +2230,7 @@
           <p:cNvPr id="6" name="Espaço Reservado para Número de Slide 5">
             <a:extLst>
               <a:ext uri="{FF2B5EF4-FFF2-40B4-BE49-F238E27FC236}">
-                <a16:creationId xmlns="" xmlns:a16="http://schemas.microsoft.com/office/drawing/2014/main" id="{86959E3D-8EAC-4E85-A452-C92A674E415A}"/>
+                <a16:creationId xmlns:a16="http://schemas.microsoft.com/office/drawing/2014/main" xmlns="" id="{86959E3D-8EAC-4E85-A452-C92A674E415A}"/>
               </a:ext>
             </a:extLst>
           </p:cNvPr>
@@ -2302,7 +2302,7 @@
           <p:cNvPr id="2" name="Título 1">
             <a:extLst>
               <a:ext uri="{FF2B5EF4-FFF2-40B4-BE49-F238E27FC236}">
-                <a16:creationId xmlns="" xmlns:a16="http://schemas.microsoft.com/office/drawing/2014/main" id="{995E5FA6-1A81-4E5D-B022-5DF575AF9DA4}"/>
+                <a16:creationId xmlns:a16="http://schemas.microsoft.com/office/drawing/2014/main" xmlns="" id="{995E5FA6-1A81-4E5D-B022-5DF575AF9DA4}"/>
               </a:ext>
             </a:extLst>
           </p:cNvPr>
@@ -2330,7 +2330,7 @@
           <p:cNvPr id="3" name="Espaço Reservado para Conteúdo 2">
             <a:extLst>
               <a:ext uri="{FF2B5EF4-FFF2-40B4-BE49-F238E27FC236}">
-                <a16:creationId xmlns="" xmlns:a16="http://schemas.microsoft.com/office/drawing/2014/main" id="{71273EF3-2F1A-4E1D-B2AD-76BA63C962F5}"/>
+                <a16:creationId xmlns:a16="http://schemas.microsoft.com/office/drawing/2014/main" xmlns="" id="{71273EF3-2F1A-4E1D-B2AD-76BA63C962F5}"/>
               </a:ext>
             </a:extLst>
           </p:cNvPr>
@@ -2392,7 +2392,7 @@
           <p:cNvPr id="4" name="Espaço Reservado para Conteúdo 3">
             <a:extLst>
               <a:ext uri="{FF2B5EF4-FFF2-40B4-BE49-F238E27FC236}">
-                <a16:creationId xmlns="" xmlns:a16="http://schemas.microsoft.com/office/drawing/2014/main" id="{29604B66-321E-477B-8FA8-543DB42E109C}"/>
+                <a16:creationId xmlns:a16="http://schemas.microsoft.com/office/drawing/2014/main" xmlns="" id="{29604B66-321E-477B-8FA8-543DB42E109C}"/>
               </a:ext>
             </a:extLst>
           </p:cNvPr>
@@ -2454,7 +2454,7 @@
           <p:cNvPr id="5" name="Espaço Reservado para Data 4">
             <a:extLst>
               <a:ext uri="{FF2B5EF4-FFF2-40B4-BE49-F238E27FC236}">
-                <a16:creationId xmlns="" xmlns:a16="http://schemas.microsoft.com/office/drawing/2014/main" id="{F253A07D-B979-4686-90B7-FFFA241097EC}"/>
+                <a16:creationId xmlns:a16="http://schemas.microsoft.com/office/drawing/2014/main" xmlns="" id="{F253A07D-B979-4686-90B7-FFFA241097EC}"/>
               </a:ext>
             </a:extLst>
           </p:cNvPr>
@@ -2479,7 +2479,7 @@
                 </a:solidFill>
               </a:rPr>
               <a:pPr/>
-              <a:t>24/08/2026</a:t>
+              <a:t>26/10/2026</a:t>
             </a:fld>
             <a:endParaRPr lang="pt-BR">
               <a:solidFill>
@@ -2496,7 +2496,7 @@
           <p:cNvPr id="6" name="Espaço Reservado para Rodapé 5">
             <a:extLst>
               <a:ext uri="{FF2B5EF4-FFF2-40B4-BE49-F238E27FC236}">
-                <a16:creationId xmlns="" xmlns:a16="http://schemas.microsoft.com/office/drawing/2014/main" id="{05110214-47E3-48CC-B489-E89EFBCC4FCF}"/>
+                <a16:creationId xmlns:a16="http://schemas.microsoft.com/office/drawing/2014/main" xmlns="" id="{05110214-47E3-48CC-B489-E89EFBCC4FCF}"/>
               </a:ext>
             </a:extLst>
           </p:cNvPr>
@@ -2527,7 +2527,7 @@
           <p:cNvPr id="7" name="Espaço Reservado para Número de Slide 6">
             <a:extLst>
               <a:ext uri="{FF2B5EF4-FFF2-40B4-BE49-F238E27FC236}">
-                <a16:creationId xmlns="" xmlns:a16="http://schemas.microsoft.com/office/drawing/2014/main" id="{51B8360E-5778-49AD-9DCA-5C0CA11F7370}"/>
+                <a16:creationId xmlns:a16="http://schemas.microsoft.com/office/drawing/2014/main" xmlns="" id="{51B8360E-5778-49AD-9DCA-5C0CA11F7370}"/>
               </a:ext>
             </a:extLst>
           </p:cNvPr>
@@ -2599,7 +2599,7 @@
           <p:cNvPr id="2" name="Título 1">
             <a:extLst>
               <a:ext uri="{FF2B5EF4-FFF2-40B4-BE49-F238E27FC236}">
-                <a16:creationId xmlns="" xmlns:a16="http://schemas.microsoft.com/office/drawing/2014/main" id="{A9BCDB93-CB3F-4DAF-B711-F17924C47D62}"/>
+                <a16:creationId xmlns:a16="http://schemas.microsoft.com/office/drawing/2014/main" xmlns="" id="{A9BCDB93-CB3F-4DAF-B711-F17924C47D62}"/>
               </a:ext>
             </a:extLst>
           </p:cNvPr>
@@ -2632,7 +2632,7 @@
           <p:cNvPr id="3" name="Espaço Reservado para Texto 2">
             <a:extLst>
               <a:ext uri="{FF2B5EF4-FFF2-40B4-BE49-F238E27FC236}">
-                <a16:creationId xmlns="" xmlns:a16="http://schemas.microsoft.com/office/drawing/2014/main" id="{93269E05-AC51-4442-A14F-75299B2E236F}"/>
+                <a16:creationId xmlns:a16="http://schemas.microsoft.com/office/drawing/2014/main" xmlns="" id="{93269E05-AC51-4442-A14F-75299B2E236F}"/>
               </a:ext>
             </a:extLst>
           </p:cNvPr>
@@ -2703,7 +2703,7 @@
           <p:cNvPr id="4" name="Espaço Reservado para Conteúdo 3">
             <a:extLst>
               <a:ext uri="{FF2B5EF4-FFF2-40B4-BE49-F238E27FC236}">
-                <a16:creationId xmlns="" xmlns:a16="http://schemas.microsoft.com/office/drawing/2014/main" id="{206C4388-9DC3-4C28-97A5-123DFCDBEEB4}"/>
+                <a16:creationId xmlns:a16="http://schemas.microsoft.com/office/drawing/2014/main" xmlns="" id="{206C4388-9DC3-4C28-97A5-123DFCDBEEB4}"/>
               </a:ext>
             </a:extLst>
           </p:cNvPr>
@@ -2765,7 +2765,7 @@
           <p:cNvPr id="5" name="Espaço Reservado para Texto 4">
             <a:extLst>
               <a:ext uri="{FF2B5EF4-FFF2-40B4-BE49-F238E27FC236}">
-                <a16:creationId xmlns="" xmlns:a16="http://schemas.microsoft.com/office/drawing/2014/main" id="{865FD78F-8BA2-4733-862C-1170792E4CF5}"/>
+                <a16:creationId xmlns:a16="http://schemas.microsoft.com/office/drawing/2014/main" xmlns="" id="{865FD78F-8BA2-4733-862C-1170792E4CF5}"/>
               </a:ext>
             </a:extLst>
           </p:cNvPr>
@@ -2836,7 +2836,7 @@
           <p:cNvPr id="6" name="Espaço Reservado para Conteúdo 5">
             <a:extLst>
               <a:ext uri="{FF2B5EF4-FFF2-40B4-BE49-F238E27FC236}">
-                <a16:creationId xmlns="" xmlns:a16="http://schemas.microsoft.com/office/drawing/2014/main" id="{0D1718E3-43DC-402F-9711-0F1802C99A2C}"/>
+                <a16:creationId xmlns:a16="http://schemas.microsoft.com/office/drawing/2014/main" xmlns="" id="{0D1718E3-43DC-402F-9711-0F1802C99A2C}"/>
               </a:ext>
             </a:extLst>
           </p:cNvPr>
@@ -2898,7 +2898,7 @@
           <p:cNvPr id="7" name="Espaço Reservado para Data 6">
             <a:extLst>
               <a:ext uri="{FF2B5EF4-FFF2-40B4-BE49-F238E27FC236}">
-                <a16:creationId xmlns="" xmlns:a16="http://schemas.microsoft.com/office/drawing/2014/main" id="{BEBBF3EE-4D00-4255-A25D-731354E47763}"/>
+                <a16:creationId xmlns:a16="http://schemas.microsoft.com/office/drawing/2014/main" xmlns="" id="{BEBBF3EE-4D00-4255-A25D-731354E47763}"/>
               </a:ext>
             </a:extLst>
           </p:cNvPr>
@@ -2923,7 +2923,7 @@
                 </a:solidFill>
               </a:rPr>
               <a:pPr/>
-              <a:t>24/08/2026</a:t>
+              <a:t>26/10/2026</a:t>
             </a:fld>
             <a:endParaRPr lang="pt-BR">
               <a:solidFill>
@@ -2940,7 +2940,7 @@
           <p:cNvPr id="8" name="Espaço Reservado para Rodapé 7">
             <a:extLst>
               <a:ext uri="{FF2B5EF4-FFF2-40B4-BE49-F238E27FC236}">
-                <a16:creationId xmlns="" xmlns:a16="http://schemas.microsoft.com/office/drawing/2014/main" id="{1BF8C3D4-27B9-49A9-A47C-B24D3439C092}"/>
+                <a16:creationId xmlns:a16="http://schemas.microsoft.com/office/drawing/2014/main" xmlns="" id="{1BF8C3D4-27B9-49A9-A47C-B24D3439C092}"/>
               </a:ext>
             </a:extLst>
           </p:cNvPr>
@@ -2971,7 +2971,7 @@
           <p:cNvPr id="9" name="Espaço Reservado para Número de Slide 8">
             <a:extLst>
               <a:ext uri="{FF2B5EF4-FFF2-40B4-BE49-F238E27FC236}">
-                <a16:creationId xmlns="" xmlns:a16="http://schemas.microsoft.com/office/drawing/2014/main" id="{291A8264-3F7E-478B-B675-1DED67FBF3FA}"/>
+                <a16:creationId xmlns:a16="http://schemas.microsoft.com/office/drawing/2014/main" xmlns="" id="{291A8264-3F7E-478B-B675-1DED67FBF3FA}"/>
               </a:ext>
             </a:extLst>
           </p:cNvPr>
@@ -3043,7 +3043,7 @@
           <p:cNvPr id="2" name="Título 1">
             <a:extLst>
               <a:ext uri="{FF2B5EF4-FFF2-40B4-BE49-F238E27FC236}">
-                <a16:creationId xmlns="" xmlns:a16="http://schemas.microsoft.com/office/drawing/2014/main" id="{20331760-F9E1-4B4B-BFF2-675C38B04B92}"/>
+                <a16:creationId xmlns:a16="http://schemas.microsoft.com/office/drawing/2014/main" xmlns="" id="{20331760-F9E1-4B4B-BFF2-675C38B04B92}"/>
               </a:ext>
             </a:extLst>
           </p:cNvPr>
@@ -3071,7 +3071,7 @@
           <p:cNvPr id="3" name="Espaço Reservado para Data 2">
             <a:extLst>
               <a:ext uri="{FF2B5EF4-FFF2-40B4-BE49-F238E27FC236}">
-                <a16:creationId xmlns="" xmlns:a16="http://schemas.microsoft.com/office/drawing/2014/main" id="{65858EED-14C0-4F8F-8479-39E9141BB202}"/>
+                <a16:creationId xmlns:a16="http://schemas.microsoft.com/office/drawing/2014/main" xmlns="" id="{65858EED-14C0-4F8F-8479-39E9141BB202}"/>
               </a:ext>
             </a:extLst>
           </p:cNvPr>
@@ -3096,7 +3096,7 @@
                 </a:solidFill>
               </a:rPr>
               <a:pPr/>
-              <a:t>24/08/2026</a:t>
+              <a:t>26/10/2026</a:t>
             </a:fld>
             <a:endParaRPr lang="pt-BR">
               <a:solidFill>
@@ -3113,7 +3113,7 @@
           <p:cNvPr id="4" name="Espaço Reservado para Rodapé 3">
             <a:extLst>
               <a:ext uri="{FF2B5EF4-FFF2-40B4-BE49-F238E27FC236}">
-                <a16:creationId xmlns="" xmlns:a16="http://schemas.microsoft.com/office/drawing/2014/main" id="{9CB77C2B-DD04-491C-B47E-540FFFEF6661}"/>
+                <a16:creationId xmlns:a16="http://schemas.microsoft.com/office/drawing/2014/main" xmlns="" id="{9CB77C2B-DD04-491C-B47E-540FFFEF6661}"/>
               </a:ext>
             </a:extLst>
           </p:cNvPr>
@@ -3144,7 +3144,7 @@
           <p:cNvPr id="5" name="Espaço Reservado para Número de Slide 4">
             <a:extLst>
               <a:ext uri="{FF2B5EF4-FFF2-40B4-BE49-F238E27FC236}">
-                <a16:creationId xmlns="" xmlns:a16="http://schemas.microsoft.com/office/drawing/2014/main" id="{727E9D95-EFC1-446F-AACB-FE8BEFA7F815}"/>
+                <a16:creationId xmlns:a16="http://schemas.microsoft.com/office/drawing/2014/main" xmlns="" id="{727E9D95-EFC1-446F-AACB-FE8BEFA7F815}"/>
               </a:ext>
             </a:extLst>
           </p:cNvPr>
@@ -3216,7 +3216,7 @@
           <p:cNvPr id="2" name="Espaço Reservado para Data 1">
             <a:extLst>
               <a:ext uri="{FF2B5EF4-FFF2-40B4-BE49-F238E27FC236}">
-                <a16:creationId xmlns="" xmlns:a16="http://schemas.microsoft.com/office/drawing/2014/main" id="{C1BDF033-3FE5-40C7-858E-EE51CE08FDD5}"/>
+                <a16:creationId xmlns:a16="http://schemas.microsoft.com/office/drawing/2014/main" xmlns="" id="{C1BDF033-3FE5-40C7-858E-EE51CE08FDD5}"/>
               </a:ext>
             </a:extLst>
           </p:cNvPr>
@@ -3241,7 +3241,7 @@
                 </a:solidFill>
               </a:rPr>
               <a:pPr/>
-              <a:t>24/08/2026</a:t>
+              <a:t>26/10/2026</a:t>
             </a:fld>
             <a:endParaRPr lang="pt-BR">
               <a:solidFill>
@@ -3258,7 +3258,7 @@
           <p:cNvPr id="3" name="Espaço Reservado para Rodapé 2">
             <a:extLst>
               <a:ext uri="{FF2B5EF4-FFF2-40B4-BE49-F238E27FC236}">
-                <a16:creationId xmlns="" xmlns:a16="http://schemas.microsoft.com/office/drawing/2014/main" id="{D18AE2F7-CE72-4C4F-846E-D0A37CA5024C}"/>
+                <a16:creationId xmlns:a16="http://schemas.microsoft.com/office/drawing/2014/main" xmlns="" id="{D18AE2F7-CE72-4C4F-846E-D0A37CA5024C}"/>
               </a:ext>
             </a:extLst>
           </p:cNvPr>
@@ -3289,7 +3289,7 @@
           <p:cNvPr id="4" name="Espaço Reservado para Número de Slide 3">
             <a:extLst>
               <a:ext uri="{FF2B5EF4-FFF2-40B4-BE49-F238E27FC236}">
-                <a16:creationId xmlns="" xmlns:a16="http://schemas.microsoft.com/office/drawing/2014/main" id="{962C2501-25D4-4C30-B841-62FC41F93B8E}"/>
+                <a16:creationId xmlns:a16="http://schemas.microsoft.com/office/drawing/2014/main" xmlns="" id="{962C2501-25D4-4C30-B841-62FC41F93B8E}"/>
               </a:ext>
             </a:extLst>
           </p:cNvPr>
@@ -3361,7 +3361,7 @@
           <p:cNvPr id="2" name="Título 1">
             <a:extLst>
               <a:ext uri="{FF2B5EF4-FFF2-40B4-BE49-F238E27FC236}">
-                <a16:creationId xmlns="" xmlns:a16="http://schemas.microsoft.com/office/drawing/2014/main" id="{33D94796-8726-4AAE-AC5D-CE74D56C0F01}"/>
+                <a16:creationId xmlns:a16="http://schemas.microsoft.com/office/drawing/2014/main" xmlns="" id="{33D94796-8726-4AAE-AC5D-CE74D56C0F01}"/>
               </a:ext>
             </a:extLst>
           </p:cNvPr>
@@ -3398,7 +3398,7 @@
           <p:cNvPr id="3" name="Espaço Reservado para Conteúdo 2">
             <a:extLst>
               <a:ext uri="{FF2B5EF4-FFF2-40B4-BE49-F238E27FC236}">
-                <a16:creationId xmlns="" xmlns:a16="http://schemas.microsoft.com/office/drawing/2014/main" id="{94CF62B1-B405-4453-81B3-BBF330A12F7C}"/>
+                <a16:creationId xmlns:a16="http://schemas.microsoft.com/office/drawing/2014/main" xmlns="" id="{94CF62B1-B405-4453-81B3-BBF330A12F7C}"/>
               </a:ext>
             </a:extLst>
           </p:cNvPr>
@@ -3488,7 +3488,7 @@
           <p:cNvPr id="4" name="Espaço Reservado para Texto 3">
             <a:extLst>
               <a:ext uri="{FF2B5EF4-FFF2-40B4-BE49-F238E27FC236}">
-                <a16:creationId xmlns="" xmlns:a16="http://schemas.microsoft.com/office/drawing/2014/main" id="{DCCE8557-F1EF-4916-8777-E641CF965201}"/>
+                <a16:creationId xmlns:a16="http://schemas.microsoft.com/office/drawing/2014/main" xmlns="" id="{DCCE8557-F1EF-4916-8777-E641CF965201}"/>
               </a:ext>
             </a:extLst>
           </p:cNvPr>
@@ -3559,7 +3559,7 @@
           <p:cNvPr id="5" name="Espaço Reservado para Data 4">
             <a:extLst>
               <a:ext uri="{FF2B5EF4-FFF2-40B4-BE49-F238E27FC236}">
-                <a16:creationId xmlns="" xmlns:a16="http://schemas.microsoft.com/office/drawing/2014/main" id="{9D1F7E9A-08E9-4FEE-8E85-AEED6409643B}"/>
+                <a16:creationId xmlns:a16="http://schemas.microsoft.com/office/drawing/2014/main" xmlns="" id="{9D1F7E9A-08E9-4FEE-8E85-AEED6409643B}"/>
               </a:ext>
             </a:extLst>
           </p:cNvPr>
@@ -3584,7 +3584,7 @@
                 </a:solidFill>
               </a:rPr>
               <a:pPr/>
-              <a:t>24/08/2026</a:t>
+              <a:t>26/10/2026</a:t>
             </a:fld>
             <a:endParaRPr lang="pt-BR">
               <a:solidFill>
@@ -3601,7 +3601,7 @@
           <p:cNvPr id="6" name="Espaço Reservado para Rodapé 5">
             <a:extLst>
               <a:ext uri="{FF2B5EF4-FFF2-40B4-BE49-F238E27FC236}">
-                <a16:creationId xmlns="" xmlns:a16="http://schemas.microsoft.com/office/drawing/2014/main" id="{FFFCCC7A-AD0F-43C9-B27C-78C7AD994823}"/>
+                <a16:creationId xmlns:a16="http://schemas.microsoft.com/office/drawing/2014/main" xmlns="" id="{FFFCCC7A-AD0F-43C9-B27C-78C7AD994823}"/>
               </a:ext>
             </a:extLst>
           </p:cNvPr>
@@ -3632,7 +3632,7 @@
           <p:cNvPr id="7" name="Espaço Reservado para Número de Slide 6">
             <a:extLst>
               <a:ext uri="{FF2B5EF4-FFF2-40B4-BE49-F238E27FC236}">
-                <a16:creationId xmlns="" xmlns:a16="http://schemas.microsoft.com/office/drawing/2014/main" id="{2273CF1A-48E1-4E34-99EC-87CB3177C789}"/>
+                <a16:creationId xmlns:a16="http://schemas.microsoft.com/office/drawing/2014/main" xmlns="" id="{2273CF1A-48E1-4E34-99EC-87CB3177C789}"/>
               </a:ext>
             </a:extLst>
           </p:cNvPr>
@@ -3704,7 +3704,7 @@
           <p:cNvPr id="2" name="Título 1">
             <a:extLst>
               <a:ext uri="{FF2B5EF4-FFF2-40B4-BE49-F238E27FC236}">
-                <a16:creationId xmlns:a16="http://schemas.microsoft.com/office/drawing/2014/main" xmlns="" id="{7FBDC090-8FD0-4A1C-8DE9-804389A94AA3}"/>
+                <a16:creationId xmlns="" xmlns:a16="http://schemas.microsoft.com/office/drawing/2014/main" id="{7FBDC090-8FD0-4A1C-8DE9-804389A94AA3}"/>
               </a:ext>
             </a:extLst>
           </p:cNvPr>
@@ -3732,7 +3732,7 @@
           <p:cNvPr id="3" name="Espaço Reservado para Conteúdo 2">
             <a:extLst>
               <a:ext uri="{FF2B5EF4-FFF2-40B4-BE49-F238E27FC236}">
-                <a16:creationId xmlns:a16="http://schemas.microsoft.com/office/drawing/2014/main" xmlns="" id="{6093E21E-854B-43DE-93CF-BAE354EB6E80}"/>
+                <a16:creationId xmlns="" xmlns:a16="http://schemas.microsoft.com/office/drawing/2014/main" id="{6093E21E-854B-43DE-93CF-BAE354EB6E80}"/>
               </a:ext>
             </a:extLst>
           </p:cNvPr>
@@ -3789,7 +3789,7 @@
           <p:cNvPr id="4" name="Espaço Reservado para Data 3">
             <a:extLst>
               <a:ext uri="{FF2B5EF4-FFF2-40B4-BE49-F238E27FC236}">
-                <a16:creationId xmlns:a16="http://schemas.microsoft.com/office/drawing/2014/main" xmlns="" id="{51A896D1-7525-4CFA-A6E7-50F54B58CB38}"/>
+                <a16:creationId xmlns="" xmlns:a16="http://schemas.microsoft.com/office/drawing/2014/main" id="{51A896D1-7525-4CFA-A6E7-50F54B58CB38}"/>
               </a:ext>
             </a:extLst>
           </p:cNvPr>
@@ -3807,7 +3807,7 @@
           <a:p>
             <a:fld id="{DF13A7C9-E623-47E9-BF8C-18B1142F2EF1}" type="datetimeFigureOut">
               <a:rPr lang="pt-BR" smtClean="0"/>
-              <a:t>24/08/2026</a:t>
+              <a:t>26/10/2026</a:t>
             </a:fld>
             <a:endParaRPr lang="pt-BR"/>
           </a:p>
@@ -3818,7 +3818,7 @@
           <p:cNvPr id="5" name="Espaço Reservado para Rodapé 4">
             <a:extLst>
               <a:ext uri="{FF2B5EF4-FFF2-40B4-BE49-F238E27FC236}">
-                <a16:creationId xmlns:a16="http://schemas.microsoft.com/office/drawing/2014/main" xmlns="" id="{52C3688C-FE15-4776-93B6-C47D7E046349}"/>
+                <a16:creationId xmlns="" xmlns:a16="http://schemas.microsoft.com/office/drawing/2014/main" id="{52C3688C-FE15-4776-93B6-C47D7E046349}"/>
               </a:ext>
             </a:extLst>
           </p:cNvPr>
@@ -3843,7 +3843,7 @@
           <p:cNvPr id="6" name="Espaço Reservado para Número de Slide 5">
             <a:extLst>
               <a:ext uri="{FF2B5EF4-FFF2-40B4-BE49-F238E27FC236}">
-                <a16:creationId xmlns:a16="http://schemas.microsoft.com/office/drawing/2014/main" xmlns="" id="{A7258081-001C-46AB-B235-24B9B68DB29E}"/>
+                <a16:creationId xmlns="" xmlns:a16="http://schemas.microsoft.com/office/drawing/2014/main" id="{A7258081-001C-46AB-B235-24B9B68DB29E}"/>
               </a:ext>
             </a:extLst>
           </p:cNvPr>
@@ -3902,7 +3902,7 @@
           <p:cNvPr id="2" name="Título 1">
             <a:extLst>
               <a:ext uri="{FF2B5EF4-FFF2-40B4-BE49-F238E27FC236}">
-                <a16:creationId xmlns="" xmlns:a16="http://schemas.microsoft.com/office/drawing/2014/main" id="{02CB7C83-54D7-4A22-9E0C-BF0E58D4EDC7}"/>
+                <a16:creationId xmlns:a16="http://schemas.microsoft.com/office/drawing/2014/main" xmlns="" id="{02CB7C83-54D7-4A22-9E0C-BF0E58D4EDC7}"/>
               </a:ext>
             </a:extLst>
           </p:cNvPr>
@@ -3939,7 +3939,7 @@
           <p:cNvPr id="3" name="Espaço Reservado para Imagem 2">
             <a:extLst>
               <a:ext uri="{FF2B5EF4-FFF2-40B4-BE49-F238E27FC236}">
-                <a16:creationId xmlns="" xmlns:a16="http://schemas.microsoft.com/office/drawing/2014/main" id="{124ADACA-02F7-4530-B7E3-8DCF1B56FBA8}"/>
+                <a16:creationId xmlns:a16="http://schemas.microsoft.com/office/drawing/2014/main" xmlns="" id="{124ADACA-02F7-4530-B7E3-8DCF1B56FBA8}"/>
               </a:ext>
             </a:extLst>
           </p:cNvPr>
@@ -4006,7 +4006,7 @@
           <p:cNvPr id="4" name="Espaço Reservado para Texto 3">
             <a:extLst>
               <a:ext uri="{FF2B5EF4-FFF2-40B4-BE49-F238E27FC236}">
-                <a16:creationId xmlns="" xmlns:a16="http://schemas.microsoft.com/office/drawing/2014/main" id="{1CD1D262-F9E5-4229-9B2B-80CD7F6A8372}"/>
+                <a16:creationId xmlns:a16="http://schemas.microsoft.com/office/drawing/2014/main" xmlns="" id="{1CD1D262-F9E5-4229-9B2B-80CD7F6A8372}"/>
               </a:ext>
             </a:extLst>
           </p:cNvPr>
@@ -4077,7 +4077,7 @@
           <p:cNvPr id="5" name="Espaço Reservado para Data 4">
             <a:extLst>
               <a:ext uri="{FF2B5EF4-FFF2-40B4-BE49-F238E27FC236}">
-                <a16:creationId xmlns="" xmlns:a16="http://schemas.microsoft.com/office/drawing/2014/main" id="{22AE3219-D351-4A13-8888-A25AFA7F8CB4}"/>
+                <a16:creationId xmlns:a16="http://schemas.microsoft.com/office/drawing/2014/main" xmlns="" id="{22AE3219-D351-4A13-8888-A25AFA7F8CB4}"/>
               </a:ext>
             </a:extLst>
           </p:cNvPr>
@@ -4102,7 +4102,7 @@
                 </a:solidFill>
               </a:rPr>
               <a:pPr/>
-              <a:t>24/08/2026</a:t>
+              <a:t>26/10/2026</a:t>
             </a:fld>
             <a:endParaRPr lang="pt-BR">
               <a:solidFill>
@@ -4119,7 +4119,7 @@
           <p:cNvPr id="6" name="Espaço Reservado para Rodapé 5">
             <a:extLst>
               <a:ext uri="{FF2B5EF4-FFF2-40B4-BE49-F238E27FC236}">
-                <a16:creationId xmlns="" xmlns:a16="http://schemas.microsoft.com/office/drawing/2014/main" id="{9BDDF6A5-A2E3-42EA-AC20-8628984DE29F}"/>
+                <a16:creationId xmlns:a16="http://schemas.microsoft.com/office/drawing/2014/main" xmlns="" id="{9BDDF6A5-A2E3-42EA-AC20-8628984DE29F}"/>
               </a:ext>
             </a:extLst>
           </p:cNvPr>
@@ -4150,7 +4150,7 @@
           <p:cNvPr id="7" name="Espaço Reservado para Número de Slide 6">
             <a:extLst>
               <a:ext uri="{FF2B5EF4-FFF2-40B4-BE49-F238E27FC236}">
-                <a16:creationId xmlns="" xmlns:a16="http://schemas.microsoft.com/office/drawing/2014/main" id="{CD0E8ED9-0335-4E8E-B1F3-9FB730CC5D44}"/>
+                <a16:creationId xmlns:a16="http://schemas.microsoft.com/office/drawing/2014/main" xmlns="" id="{CD0E8ED9-0335-4E8E-B1F3-9FB730CC5D44}"/>
               </a:ext>
             </a:extLst>
           </p:cNvPr>
@@ -4222,7 +4222,7 @@
           <p:cNvPr id="2" name="Título 1">
             <a:extLst>
               <a:ext uri="{FF2B5EF4-FFF2-40B4-BE49-F238E27FC236}">
-                <a16:creationId xmlns="" xmlns:a16="http://schemas.microsoft.com/office/drawing/2014/main" id="{C82D172F-92AE-40A1-9E61-E06F0EB54DE3}"/>
+                <a16:creationId xmlns:a16="http://schemas.microsoft.com/office/drawing/2014/main" xmlns="" id="{C82D172F-92AE-40A1-9E61-E06F0EB54DE3}"/>
               </a:ext>
             </a:extLst>
           </p:cNvPr>
@@ -4250,7 +4250,7 @@
           <p:cNvPr id="3" name="Espaço Reservado para Texto Vertical 2">
             <a:extLst>
               <a:ext uri="{FF2B5EF4-FFF2-40B4-BE49-F238E27FC236}">
-                <a16:creationId xmlns="" xmlns:a16="http://schemas.microsoft.com/office/drawing/2014/main" id="{CC9D0A08-166D-4402-A266-32845CE6E354}"/>
+                <a16:creationId xmlns:a16="http://schemas.microsoft.com/office/drawing/2014/main" xmlns="" id="{CC9D0A08-166D-4402-A266-32845CE6E354}"/>
               </a:ext>
             </a:extLst>
           </p:cNvPr>
@@ -4307,7 +4307,7 @@
           <p:cNvPr id="4" name="Espaço Reservado para Data 3">
             <a:extLst>
               <a:ext uri="{FF2B5EF4-FFF2-40B4-BE49-F238E27FC236}">
-                <a16:creationId xmlns="" xmlns:a16="http://schemas.microsoft.com/office/drawing/2014/main" id="{A98A9E39-166E-4749-BA94-72E636A62AF1}"/>
+                <a16:creationId xmlns:a16="http://schemas.microsoft.com/office/drawing/2014/main" xmlns="" id="{A98A9E39-166E-4749-BA94-72E636A62AF1}"/>
               </a:ext>
             </a:extLst>
           </p:cNvPr>
@@ -4332,7 +4332,7 @@
                 </a:solidFill>
               </a:rPr>
               <a:pPr/>
-              <a:t>24/08/2026</a:t>
+              <a:t>26/10/2026</a:t>
             </a:fld>
             <a:endParaRPr lang="pt-BR">
               <a:solidFill>
@@ -4349,7 +4349,7 @@
           <p:cNvPr id="5" name="Espaço Reservado para Rodapé 4">
             <a:extLst>
               <a:ext uri="{FF2B5EF4-FFF2-40B4-BE49-F238E27FC236}">
-                <a16:creationId xmlns="" xmlns:a16="http://schemas.microsoft.com/office/drawing/2014/main" id="{3BFD5E80-1F9D-421B-B410-00F80A1EE941}"/>
+                <a16:creationId xmlns:a16="http://schemas.microsoft.com/office/drawing/2014/main" xmlns="" id="{3BFD5E80-1F9D-421B-B410-00F80A1EE941}"/>
               </a:ext>
             </a:extLst>
           </p:cNvPr>
@@ -4380,7 +4380,7 @@
           <p:cNvPr id="6" name="Espaço Reservado para Número de Slide 5">
             <a:extLst>
               <a:ext uri="{FF2B5EF4-FFF2-40B4-BE49-F238E27FC236}">
-                <a16:creationId xmlns="" xmlns:a16="http://schemas.microsoft.com/office/drawing/2014/main" id="{FDF84E03-26E0-416C-8554-98855E690244}"/>
+                <a16:creationId xmlns:a16="http://schemas.microsoft.com/office/drawing/2014/main" xmlns="" id="{FDF84E03-26E0-416C-8554-98855E690244}"/>
               </a:ext>
             </a:extLst>
           </p:cNvPr>
@@ -4452,7 +4452,7 @@
           <p:cNvPr id="2" name="Título Vertical 1">
             <a:extLst>
               <a:ext uri="{FF2B5EF4-FFF2-40B4-BE49-F238E27FC236}">
-                <a16:creationId xmlns="" xmlns:a16="http://schemas.microsoft.com/office/drawing/2014/main" id="{9D45F066-5B8A-48FC-9B33-AE0EE929F054}"/>
+                <a16:creationId xmlns:a16="http://schemas.microsoft.com/office/drawing/2014/main" xmlns="" id="{9D45F066-5B8A-48FC-9B33-AE0EE929F054}"/>
               </a:ext>
             </a:extLst>
           </p:cNvPr>
@@ -4485,7 +4485,7 @@
           <p:cNvPr id="3" name="Espaço Reservado para Texto Vertical 2">
             <a:extLst>
               <a:ext uri="{FF2B5EF4-FFF2-40B4-BE49-F238E27FC236}">
-                <a16:creationId xmlns="" xmlns:a16="http://schemas.microsoft.com/office/drawing/2014/main" id="{9DCECA87-69D0-4051-8163-CBA414B017CD}"/>
+                <a16:creationId xmlns:a16="http://schemas.microsoft.com/office/drawing/2014/main" xmlns="" id="{9DCECA87-69D0-4051-8163-CBA414B017CD}"/>
               </a:ext>
             </a:extLst>
           </p:cNvPr>
@@ -4547,7 +4547,7 @@
           <p:cNvPr id="4" name="Espaço Reservado para Data 3">
             <a:extLst>
               <a:ext uri="{FF2B5EF4-FFF2-40B4-BE49-F238E27FC236}">
-                <a16:creationId xmlns="" xmlns:a16="http://schemas.microsoft.com/office/drawing/2014/main" id="{52BDC7E5-655D-4405-AE2D-9A058DE76678}"/>
+                <a16:creationId xmlns:a16="http://schemas.microsoft.com/office/drawing/2014/main" xmlns="" id="{52BDC7E5-655D-4405-AE2D-9A058DE76678}"/>
               </a:ext>
             </a:extLst>
           </p:cNvPr>
@@ -4572,7 +4572,7 @@
                 </a:solidFill>
               </a:rPr>
               <a:pPr/>
-              <a:t>24/08/2026</a:t>
+              <a:t>26/10/2026</a:t>
             </a:fld>
             <a:endParaRPr lang="pt-BR">
               <a:solidFill>
@@ -4589,7 +4589,7 @@
           <p:cNvPr id="5" name="Espaço Reservado para Rodapé 4">
             <a:extLst>
               <a:ext uri="{FF2B5EF4-FFF2-40B4-BE49-F238E27FC236}">
-                <a16:creationId xmlns="" xmlns:a16="http://schemas.microsoft.com/office/drawing/2014/main" id="{D367C9E1-79EE-4966-AE6F-17B93D9D55AB}"/>
+                <a16:creationId xmlns:a16="http://schemas.microsoft.com/office/drawing/2014/main" xmlns="" id="{D367C9E1-79EE-4966-AE6F-17B93D9D55AB}"/>
               </a:ext>
             </a:extLst>
           </p:cNvPr>
@@ -4620,7 +4620,7 @@
           <p:cNvPr id="6" name="Espaço Reservado para Número de Slide 5">
             <a:extLst>
               <a:ext uri="{FF2B5EF4-FFF2-40B4-BE49-F238E27FC236}">
-                <a16:creationId xmlns="" xmlns:a16="http://schemas.microsoft.com/office/drawing/2014/main" id="{BDA06A84-6E45-487F-8876-E535A1762275}"/>
+                <a16:creationId xmlns:a16="http://schemas.microsoft.com/office/drawing/2014/main" xmlns="" id="{BDA06A84-6E45-487F-8876-E535A1762275}"/>
               </a:ext>
             </a:extLst>
           </p:cNvPr>
@@ -4692,7 +4692,7 @@
           <p:cNvPr id="2" name="Título 1">
             <a:extLst>
               <a:ext uri="{FF2B5EF4-FFF2-40B4-BE49-F238E27FC236}">
-                <a16:creationId xmlns:a16="http://schemas.microsoft.com/office/drawing/2014/main" xmlns="" id="{B7F2B671-170F-4991-9B5D-B25A2C212FA9}"/>
+                <a16:creationId xmlns="" xmlns:a16="http://schemas.microsoft.com/office/drawing/2014/main" id="{B7F2B671-170F-4991-9B5D-B25A2C212FA9}"/>
               </a:ext>
             </a:extLst>
           </p:cNvPr>
@@ -4729,7 +4729,7 @@
           <p:cNvPr id="3" name="Espaço Reservado para Texto 2">
             <a:extLst>
               <a:ext uri="{FF2B5EF4-FFF2-40B4-BE49-F238E27FC236}">
-                <a16:creationId xmlns:a16="http://schemas.microsoft.com/office/drawing/2014/main" xmlns="" id="{46342B92-6224-4299-99C5-F6F238BFF893}"/>
+                <a16:creationId xmlns="" xmlns:a16="http://schemas.microsoft.com/office/drawing/2014/main" id="{46342B92-6224-4299-99C5-F6F238BFF893}"/>
               </a:ext>
             </a:extLst>
           </p:cNvPr>
@@ -4854,7 +4854,7 @@
           <p:cNvPr id="4" name="Espaço Reservado para Data 3">
             <a:extLst>
               <a:ext uri="{FF2B5EF4-FFF2-40B4-BE49-F238E27FC236}">
-                <a16:creationId xmlns:a16="http://schemas.microsoft.com/office/drawing/2014/main" xmlns="" id="{7B386812-6064-4075-BA26-E6B5F019389B}"/>
+                <a16:creationId xmlns="" xmlns:a16="http://schemas.microsoft.com/office/drawing/2014/main" id="{7B386812-6064-4075-BA26-E6B5F019389B}"/>
               </a:ext>
             </a:extLst>
           </p:cNvPr>
@@ -4872,7 +4872,7 @@
           <a:p>
             <a:fld id="{DF13A7C9-E623-47E9-BF8C-18B1142F2EF1}" type="datetimeFigureOut">
               <a:rPr lang="pt-BR" smtClean="0"/>
-              <a:t>24/08/2026</a:t>
+              <a:t>26/10/2026</a:t>
             </a:fld>
             <a:endParaRPr lang="pt-BR"/>
           </a:p>
@@ -4883,7 +4883,7 @@
           <p:cNvPr id="5" name="Espaço Reservado para Rodapé 4">
             <a:extLst>
               <a:ext uri="{FF2B5EF4-FFF2-40B4-BE49-F238E27FC236}">
-                <a16:creationId xmlns:a16="http://schemas.microsoft.com/office/drawing/2014/main" xmlns="" id="{D4940B02-7C13-4D7C-9DBC-B84812DF5576}"/>
+                <a16:creationId xmlns="" xmlns:a16="http://schemas.microsoft.com/office/drawing/2014/main" id="{D4940B02-7C13-4D7C-9DBC-B84812DF5576}"/>
               </a:ext>
             </a:extLst>
           </p:cNvPr>
@@ -4908,7 +4908,7 @@
           <p:cNvPr id="6" name="Espaço Reservado para Número de Slide 5">
             <a:extLst>
               <a:ext uri="{FF2B5EF4-FFF2-40B4-BE49-F238E27FC236}">
-                <a16:creationId xmlns:a16="http://schemas.microsoft.com/office/drawing/2014/main" xmlns="" id="{86959E3D-8EAC-4E85-A452-C92A674E415A}"/>
+                <a16:creationId xmlns="" xmlns:a16="http://schemas.microsoft.com/office/drawing/2014/main" id="{86959E3D-8EAC-4E85-A452-C92A674E415A}"/>
               </a:ext>
             </a:extLst>
           </p:cNvPr>
@@ -4967,7 +4967,7 @@
           <p:cNvPr id="2" name="Título 1">
             <a:extLst>
               <a:ext uri="{FF2B5EF4-FFF2-40B4-BE49-F238E27FC236}">
-                <a16:creationId xmlns:a16="http://schemas.microsoft.com/office/drawing/2014/main" xmlns="" id="{995E5FA6-1A81-4E5D-B022-5DF575AF9DA4}"/>
+                <a16:creationId xmlns="" xmlns:a16="http://schemas.microsoft.com/office/drawing/2014/main" id="{995E5FA6-1A81-4E5D-B022-5DF575AF9DA4}"/>
               </a:ext>
             </a:extLst>
           </p:cNvPr>
@@ -4995,7 +4995,7 @@
           <p:cNvPr id="3" name="Espaço Reservado para Conteúdo 2">
             <a:extLst>
               <a:ext uri="{FF2B5EF4-FFF2-40B4-BE49-F238E27FC236}">
-                <a16:creationId xmlns:a16="http://schemas.microsoft.com/office/drawing/2014/main" xmlns="" id="{71273EF3-2F1A-4E1D-B2AD-76BA63C962F5}"/>
+                <a16:creationId xmlns="" xmlns:a16="http://schemas.microsoft.com/office/drawing/2014/main" id="{71273EF3-2F1A-4E1D-B2AD-76BA63C962F5}"/>
               </a:ext>
             </a:extLst>
           </p:cNvPr>
@@ -5057,7 +5057,7 @@
           <p:cNvPr id="4" name="Espaço Reservado para Conteúdo 3">
             <a:extLst>
               <a:ext uri="{FF2B5EF4-FFF2-40B4-BE49-F238E27FC236}">
-                <a16:creationId xmlns:a16="http://schemas.microsoft.com/office/drawing/2014/main" xmlns="" id="{29604B66-321E-477B-8FA8-543DB42E109C}"/>
+                <a16:creationId xmlns="" xmlns:a16="http://schemas.microsoft.com/office/drawing/2014/main" id="{29604B66-321E-477B-8FA8-543DB42E109C}"/>
               </a:ext>
             </a:extLst>
           </p:cNvPr>
@@ -5119,7 +5119,7 @@
           <p:cNvPr id="5" name="Espaço Reservado para Data 4">
             <a:extLst>
               <a:ext uri="{FF2B5EF4-FFF2-40B4-BE49-F238E27FC236}">
-                <a16:creationId xmlns:a16="http://schemas.microsoft.com/office/drawing/2014/main" xmlns="" id="{F253A07D-B979-4686-90B7-FFFA241097EC}"/>
+                <a16:creationId xmlns="" xmlns:a16="http://schemas.microsoft.com/office/drawing/2014/main" id="{F253A07D-B979-4686-90B7-FFFA241097EC}"/>
               </a:ext>
             </a:extLst>
           </p:cNvPr>
@@ -5137,7 +5137,7 @@
           <a:p>
             <a:fld id="{DF13A7C9-E623-47E9-BF8C-18B1142F2EF1}" type="datetimeFigureOut">
               <a:rPr lang="pt-BR" smtClean="0"/>
-              <a:t>24/08/2026</a:t>
+              <a:t>26/10/2026</a:t>
             </a:fld>
             <a:endParaRPr lang="pt-BR"/>
           </a:p>
@@ -5148,7 +5148,7 @@
           <p:cNvPr id="6" name="Espaço Reservado para Rodapé 5">
             <a:extLst>
               <a:ext uri="{FF2B5EF4-FFF2-40B4-BE49-F238E27FC236}">
-                <a16:creationId xmlns:a16="http://schemas.microsoft.com/office/drawing/2014/main" xmlns="" id="{05110214-47E3-48CC-B489-E89EFBCC4FCF}"/>
+                <a16:creationId xmlns="" xmlns:a16="http://schemas.microsoft.com/office/drawing/2014/main" id="{05110214-47E3-48CC-B489-E89EFBCC4FCF}"/>
               </a:ext>
             </a:extLst>
           </p:cNvPr>
@@ -5173,7 +5173,7 @@
           <p:cNvPr id="7" name="Espaço Reservado para Número de Slide 6">
             <a:extLst>
               <a:ext uri="{FF2B5EF4-FFF2-40B4-BE49-F238E27FC236}">
-                <a16:creationId xmlns:a16="http://schemas.microsoft.com/office/drawing/2014/main" xmlns="" id="{51B8360E-5778-49AD-9DCA-5C0CA11F7370}"/>
+                <a16:creationId xmlns="" xmlns:a16="http://schemas.microsoft.com/office/drawing/2014/main" id="{51B8360E-5778-49AD-9DCA-5C0CA11F7370}"/>
               </a:ext>
             </a:extLst>
           </p:cNvPr>
@@ -5232,7 +5232,7 @@
           <p:cNvPr id="2" name="Título 1">
             <a:extLst>
               <a:ext uri="{FF2B5EF4-FFF2-40B4-BE49-F238E27FC236}">
-                <a16:creationId xmlns:a16="http://schemas.microsoft.com/office/drawing/2014/main" xmlns="" id="{A9BCDB93-CB3F-4DAF-B711-F17924C47D62}"/>
+                <a16:creationId xmlns="" xmlns:a16="http://schemas.microsoft.com/office/drawing/2014/main" id="{A9BCDB93-CB3F-4DAF-B711-F17924C47D62}"/>
               </a:ext>
             </a:extLst>
           </p:cNvPr>
@@ -5265,7 +5265,7 @@
           <p:cNvPr id="3" name="Espaço Reservado para Texto 2">
             <a:extLst>
               <a:ext uri="{FF2B5EF4-FFF2-40B4-BE49-F238E27FC236}">
-                <a16:creationId xmlns:a16="http://schemas.microsoft.com/office/drawing/2014/main" xmlns="" id="{93269E05-AC51-4442-A14F-75299B2E236F}"/>
+                <a16:creationId xmlns="" xmlns:a16="http://schemas.microsoft.com/office/drawing/2014/main" id="{93269E05-AC51-4442-A14F-75299B2E236F}"/>
               </a:ext>
             </a:extLst>
           </p:cNvPr>
@@ -5336,7 +5336,7 @@
           <p:cNvPr id="4" name="Espaço Reservado para Conteúdo 3">
             <a:extLst>
               <a:ext uri="{FF2B5EF4-FFF2-40B4-BE49-F238E27FC236}">
-                <a16:creationId xmlns:a16="http://schemas.microsoft.com/office/drawing/2014/main" xmlns="" id="{206C4388-9DC3-4C28-97A5-123DFCDBEEB4}"/>
+                <a16:creationId xmlns="" xmlns:a16="http://schemas.microsoft.com/office/drawing/2014/main" id="{206C4388-9DC3-4C28-97A5-123DFCDBEEB4}"/>
               </a:ext>
             </a:extLst>
           </p:cNvPr>
@@ -5398,7 +5398,7 @@
           <p:cNvPr id="5" name="Espaço Reservado para Texto 4">
             <a:extLst>
               <a:ext uri="{FF2B5EF4-FFF2-40B4-BE49-F238E27FC236}">
-                <a16:creationId xmlns:a16="http://schemas.microsoft.com/office/drawing/2014/main" xmlns="" id="{865FD78F-8BA2-4733-862C-1170792E4CF5}"/>
+                <a16:creationId xmlns="" xmlns:a16="http://schemas.microsoft.com/office/drawing/2014/main" id="{865FD78F-8BA2-4733-862C-1170792E4CF5}"/>
               </a:ext>
             </a:extLst>
           </p:cNvPr>
@@ -5469,7 +5469,7 @@
           <p:cNvPr id="6" name="Espaço Reservado para Conteúdo 5">
             <a:extLst>
               <a:ext uri="{FF2B5EF4-FFF2-40B4-BE49-F238E27FC236}">
-                <a16:creationId xmlns:a16="http://schemas.microsoft.com/office/drawing/2014/main" xmlns="" id="{0D1718E3-43DC-402F-9711-0F1802C99A2C}"/>
+                <a16:creationId xmlns="" xmlns:a16="http://schemas.microsoft.com/office/drawing/2014/main" id="{0D1718E3-43DC-402F-9711-0F1802C99A2C}"/>
               </a:ext>
             </a:extLst>
           </p:cNvPr>
@@ -5531,7 +5531,7 @@
           <p:cNvPr id="7" name="Espaço Reservado para Data 6">
             <a:extLst>
               <a:ext uri="{FF2B5EF4-FFF2-40B4-BE49-F238E27FC236}">
-                <a16:creationId xmlns:a16="http://schemas.microsoft.com/office/drawing/2014/main" xmlns="" id="{BEBBF3EE-4D00-4255-A25D-731354E47763}"/>
+                <a16:creationId xmlns="" xmlns:a16="http://schemas.microsoft.com/office/drawing/2014/main" id="{BEBBF3EE-4D00-4255-A25D-731354E47763}"/>
               </a:ext>
             </a:extLst>
           </p:cNvPr>
@@ -5549,7 +5549,7 @@
           <a:p>
             <a:fld id="{DF13A7C9-E623-47E9-BF8C-18B1142F2EF1}" type="datetimeFigureOut">
               <a:rPr lang="pt-BR" smtClean="0"/>
-              <a:t>24/08/2026</a:t>
+              <a:t>26/10/2026</a:t>
             </a:fld>
             <a:endParaRPr lang="pt-BR"/>
           </a:p>
@@ -5560,7 +5560,7 @@
           <p:cNvPr id="8" name="Espaço Reservado para Rodapé 7">
             <a:extLst>
               <a:ext uri="{FF2B5EF4-FFF2-40B4-BE49-F238E27FC236}">
-                <a16:creationId xmlns:a16="http://schemas.microsoft.com/office/drawing/2014/main" xmlns="" id="{1BF8C3D4-27B9-49A9-A47C-B24D3439C092}"/>
+                <a16:creationId xmlns="" xmlns:a16="http://schemas.microsoft.com/office/drawing/2014/main" id="{1BF8C3D4-27B9-49A9-A47C-B24D3439C092}"/>
               </a:ext>
             </a:extLst>
           </p:cNvPr>
@@ -5585,7 +5585,7 @@
           <p:cNvPr id="9" name="Espaço Reservado para Número de Slide 8">
             <a:extLst>
               <a:ext uri="{FF2B5EF4-FFF2-40B4-BE49-F238E27FC236}">
-                <a16:creationId xmlns:a16="http://schemas.microsoft.com/office/drawing/2014/main" xmlns="" id="{291A8264-3F7E-478B-B675-1DED67FBF3FA}"/>
+                <a16:creationId xmlns="" xmlns:a16="http://schemas.microsoft.com/office/drawing/2014/main" id="{291A8264-3F7E-478B-B675-1DED67FBF3FA}"/>
               </a:ext>
             </a:extLst>
           </p:cNvPr>
@@ -5644,7 +5644,7 @@
           <p:cNvPr id="2" name="Título 1">
             <a:extLst>
               <a:ext uri="{FF2B5EF4-FFF2-40B4-BE49-F238E27FC236}">
-                <a16:creationId xmlns:a16="http://schemas.microsoft.com/office/drawing/2014/main" xmlns="" id="{20331760-F9E1-4B4B-BFF2-675C38B04B92}"/>
+                <a16:creationId xmlns="" xmlns:a16="http://schemas.microsoft.com/office/drawing/2014/main" id="{20331760-F9E1-4B4B-BFF2-675C38B04B92}"/>
               </a:ext>
             </a:extLst>
           </p:cNvPr>
@@ -5672,7 +5672,7 @@
           <p:cNvPr id="3" name="Espaço Reservado para Data 2">
             <a:extLst>
               <a:ext uri="{FF2B5EF4-FFF2-40B4-BE49-F238E27FC236}">
-                <a16:creationId xmlns:a16="http://schemas.microsoft.com/office/drawing/2014/main" xmlns="" id="{65858EED-14C0-4F8F-8479-39E9141BB202}"/>
+                <a16:creationId xmlns="" xmlns:a16="http://schemas.microsoft.com/office/drawing/2014/main" id="{65858EED-14C0-4F8F-8479-39E9141BB202}"/>
               </a:ext>
             </a:extLst>
           </p:cNvPr>
@@ -5690,7 +5690,7 @@
           <a:p>
             <a:fld id="{DF13A7C9-E623-47E9-BF8C-18B1142F2EF1}" type="datetimeFigureOut">
               <a:rPr lang="pt-BR" smtClean="0"/>
-              <a:t>24/08/2026</a:t>
+              <a:t>26/10/2026</a:t>
             </a:fld>
             <a:endParaRPr lang="pt-BR"/>
           </a:p>
@@ -5701,7 +5701,7 @@
           <p:cNvPr id="4" name="Espaço Reservado para Rodapé 3">
             <a:extLst>
               <a:ext uri="{FF2B5EF4-FFF2-40B4-BE49-F238E27FC236}">
-                <a16:creationId xmlns:a16="http://schemas.microsoft.com/office/drawing/2014/main" xmlns="" id="{9CB77C2B-DD04-491C-B47E-540FFFEF6661}"/>
+                <a16:creationId xmlns="" xmlns:a16="http://schemas.microsoft.com/office/drawing/2014/main" id="{9CB77C2B-DD04-491C-B47E-540FFFEF6661}"/>
               </a:ext>
             </a:extLst>
           </p:cNvPr>
@@ -5726,7 +5726,7 @@
           <p:cNvPr id="5" name="Espaço Reservado para Número de Slide 4">
             <a:extLst>
               <a:ext uri="{FF2B5EF4-FFF2-40B4-BE49-F238E27FC236}">
-                <a16:creationId xmlns:a16="http://schemas.microsoft.com/office/drawing/2014/main" xmlns="" id="{727E9D95-EFC1-446F-AACB-FE8BEFA7F815}"/>
+                <a16:creationId xmlns="" xmlns:a16="http://schemas.microsoft.com/office/drawing/2014/main" id="{727E9D95-EFC1-446F-AACB-FE8BEFA7F815}"/>
               </a:ext>
             </a:extLst>
           </p:cNvPr>
@@ -5785,7 +5785,7 @@
           <p:cNvPr id="2" name="Espaço Reservado para Data 1">
             <a:extLst>
               <a:ext uri="{FF2B5EF4-FFF2-40B4-BE49-F238E27FC236}">
-                <a16:creationId xmlns:a16="http://schemas.microsoft.com/office/drawing/2014/main" xmlns="" id="{C1BDF033-3FE5-40C7-858E-EE51CE08FDD5}"/>
+                <a16:creationId xmlns="" xmlns:a16="http://schemas.microsoft.com/office/drawing/2014/main" id="{C1BDF033-3FE5-40C7-858E-EE51CE08FDD5}"/>
               </a:ext>
             </a:extLst>
           </p:cNvPr>
@@ -5803,7 +5803,7 @@
           <a:p>
             <a:fld id="{DF13A7C9-E623-47E9-BF8C-18B1142F2EF1}" type="datetimeFigureOut">
               <a:rPr lang="pt-BR" smtClean="0"/>
-              <a:t>24/08/2026</a:t>
+              <a:t>26/10/2026</a:t>
             </a:fld>
             <a:endParaRPr lang="pt-BR"/>
           </a:p>
@@ -5814,7 +5814,7 @@
           <p:cNvPr id="3" name="Espaço Reservado para Rodapé 2">
             <a:extLst>
               <a:ext uri="{FF2B5EF4-FFF2-40B4-BE49-F238E27FC236}">
-                <a16:creationId xmlns:a16="http://schemas.microsoft.com/office/drawing/2014/main" xmlns="" id="{D18AE2F7-CE72-4C4F-846E-D0A37CA5024C}"/>
+                <a16:creationId xmlns="" xmlns:a16="http://schemas.microsoft.com/office/drawing/2014/main" id="{D18AE2F7-CE72-4C4F-846E-D0A37CA5024C}"/>
               </a:ext>
             </a:extLst>
           </p:cNvPr>
@@ -5839,7 +5839,7 @@
           <p:cNvPr id="4" name="Espaço Reservado para Número de Slide 3">
             <a:extLst>
               <a:ext uri="{FF2B5EF4-FFF2-40B4-BE49-F238E27FC236}">
-                <a16:creationId xmlns:a16="http://schemas.microsoft.com/office/drawing/2014/main" xmlns="" id="{962C2501-25D4-4C30-B841-62FC41F93B8E}"/>
+                <a16:creationId xmlns="" xmlns:a16="http://schemas.microsoft.com/office/drawing/2014/main" id="{962C2501-25D4-4C30-B841-62FC41F93B8E}"/>
               </a:ext>
             </a:extLst>
           </p:cNvPr>
@@ -5898,7 +5898,7 @@
           <p:cNvPr id="2" name="Título 1">
             <a:extLst>
               <a:ext uri="{FF2B5EF4-FFF2-40B4-BE49-F238E27FC236}">
-                <a16:creationId xmlns:a16="http://schemas.microsoft.com/office/drawing/2014/main" xmlns="" id="{33D94796-8726-4AAE-AC5D-CE74D56C0F01}"/>
+                <a16:creationId xmlns="" xmlns:a16="http://schemas.microsoft.com/office/drawing/2014/main" id="{33D94796-8726-4AAE-AC5D-CE74D56C0F01}"/>
               </a:ext>
             </a:extLst>
           </p:cNvPr>
@@ -5935,7 +5935,7 @@
           <p:cNvPr id="3" name="Espaço Reservado para Conteúdo 2">
             <a:extLst>
               <a:ext uri="{FF2B5EF4-FFF2-40B4-BE49-F238E27FC236}">
-                <a16:creationId xmlns:a16="http://schemas.microsoft.com/office/drawing/2014/main" xmlns="" id="{94CF62B1-B405-4453-81B3-BBF330A12F7C}"/>
+                <a16:creationId xmlns="" xmlns:a16="http://schemas.microsoft.com/office/drawing/2014/main" id="{94CF62B1-B405-4453-81B3-BBF330A12F7C}"/>
               </a:ext>
             </a:extLst>
           </p:cNvPr>
@@ -6025,7 +6025,7 @@
           <p:cNvPr id="4" name="Espaço Reservado para Texto 3">
             <a:extLst>
               <a:ext uri="{FF2B5EF4-FFF2-40B4-BE49-F238E27FC236}">
-                <a16:creationId xmlns:a16="http://schemas.microsoft.com/office/drawing/2014/main" xmlns="" id="{DCCE8557-F1EF-4916-8777-E641CF965201}"/>
+                <a16:creationId xmlns="" xmlns:a16="http://schemas.microsoft.com/office/drawing/2014/main" id="{DCCE8557-F1EF-4916-8777-E641CF965201}"/>
               </a:ext>
             </a:extLst>
           </p:cNvPr>
@@ -6096,7 +6096,7 @@
           <p:cNvPr id="5" name="Espaço Reservado para Data 4">
             <a:extLst>
               <a:ext uri="{FF2B5EF4-FFF2-40B4-BE49-F238E27FC236}">
-                <a16:creationId xmlns:a16="http://schemas.microsoft.com/office/drawing/2014/main" xmlns="" id="{9D1F7E9A-08E9-4FEE-8E85-AEED6409643B}"/>
+                <a16:creationId xmlns="" xmlns:a16="http://schemas.microsoft.com/office/drawing/2014/main" id="{9D1F7E9A-08E9-4FEE-8E85-AEED6409643B}"/>
               </a:ext>
             </a:extLst>
           </p:cNvPr>
@@ -6114,7 +6114,7 @@
           <a:p>
             <a:fld id="{DF13A7C9-E623-47E9-BF8C-18B1142F2EF1}" type="datetimeFigureOut">
               <a:rPr lang="pt-BR" smtClean="0"/>
-              <a:t>24/08/2026</a:t>
+              <a:t>26/10/2026</a:t>
             </a:fld>
             <a:endParaRPr lang="pt-BR"/>
           </a:p>
@@ -6125,7 +6125,7 @@
           <p:cNvPr id="6" name="Espaço Reservado para Rodapé 5">
             <a:extLst>
               <a:ext uri="{FF2B5EF4-FFF2-40B4-BE49-F238E27FC236}">
-                <a16:creationId xmlns:a16="http://schemas.microsoft.com/office/drawing/2014/main" xmlns="" id="{FFFCCC7A-AD0F-43C9-B27C-78C7AD994823}"/>
+                <a16:creationId xmlns="" xmlns:a16="http://schemas.microsoft.com/office/drawing/2014/main" id="{FFFCCC7A-AD0F-43C9-B27C-78C7AD994823}"/>
               </a:ext>
             </a:extLst>
           </p:cNvPr>
@@ -6150,7 +6150,7 @@
           <p:cNvPr id="7" name="Espaço Reservado para Número de Slide 6">
             <a:extLst>
               <a:ext uri="{FF2B5EF4-FFF2-40B4-BE49-F238E27FC236}">
-                <a16:creationId xmlns:a16="http://schemas.microsoft.com/office/drawing/2014/main" xmlns="" id="{2273CF1A-48E1-4E34-99EC-87CB3177C789}"/>
+                <a16:creationId xmlns="" xmlns:a16="http://schemas.microsoft.com/office/drawing/2014/main" id="{2273CF1A-48E1-4E34-99EC-87CB3177C789}"/>
               </a:ext>
             </a:extLst>
           </p:cNvPr>
@@ -6209,7 +6209,7 @@
           <p:cNvPr id="2" name="Título 1">
             <a:extLst>
               <a:ext uri="{FF2B5EF4-FFF2-40B4-BE49-F238E27FC236}">
-                <a16:creationId xmlns:a16="http://schemas.microsoft.com/office/drawing/2014/main" xmlns="" id="{02CB7C83-54D7-4A22-9E0C-BF0E58D4EDC7}"/>
+                <a16:creationId xmlns="" xmlns:a16="http://schemas.microsoft.com/office/drawing/2014/main" id="{02CB7C83-54D7-4A22-9E0C-BF0E58D4EDC7}"/>
               </a:ext>
             </a:extLst>
           </p:cNvPr>
@@ -6246,7 +6246,7 @@
           <p:cNvPr id="3" name="Espaço Reservado para Imagem 2">
             <a:extLst>
               <a:ext uri="{FF2B5EF4-FFF2-40B4-BE49-F238E27FC236}">
-                <a16:creationId xmlns:a16="http://schemas.microsoft.com/office/drawing/2014/main" xmlns="" id="{124ADACA-02F7-4530-B7E3-8DCF1B56FBA8}"/>
+                <a16:creationId xmlns="" xmlns:a16="http://schemas.microsoft.com/office/drawing/2014/main" id="{124ADACA-02F7-4530-B7E3-8DCF1B56FBA8}"/>
               </a:ext>
             </a:extLst>
           </p:cNvPr>
@@ -6313,7 +6313,7 @@
           <p:cNvPr id="4" name="Espaço Reservado para Texto 3">
             <a:extLst>
               <a:ext uri="{FF2B5EF4-FFF2-40B4-BE49-F238E27FC236}">
-                <a16:creationId xmlns:a16="http://schemas.microsoft.com/office/drawing/2014/main" xmlns="" id="{1CD1D262-F9E5-4229-9B2B-80CD7F6A8372}"/>
+                <a16:creationId xmlns="" xmlns:a16="http://schemas.microsoft.com/office/drawing/2014/main" id="{1CD1D262-F9E5-4229-9B2B-80CD7F6A8372}"/>
               </a:ext>
             </a:extLst>
           </p:cNvPr>
@@ -6384,7 +6384,7 @@
           <p:cNvPr id="5" name="Espaço Reservado para Data 4">
             <a:extLst>
               <a:ext uri="{FF2B5EF4-FFF2-40B4-BE49-F238E27FC236}">
-                <a16:creationId xmlns:a16="http://schemas.microsoft.com/office/drawing/2014/main" xmlns="" id="{22AE3219-D351-4A13-8888-A25AFA7F8CB4}"/>
+                <a16:creationId xmlns="" xmlns:a16="http://schemas.microsoft.com/office/drawing/2014/main" id="{22AE3219-D351-4A13-8888-A25AFA7F8CB4}"/>
               </a:ext>
             </a:extLst>
           </p:cNvPr>
@@ -6402,7 +6402,7 @@
           <a:p>
             <a:fld id="{DF13A7C9-E623-47E9-BF8C-18B1142F2EF1}" type="datetimeFigureOut">
               <a:rPr lang="pt-BR" smtClean="0"/>
-              <a:t>24/08/2026</a:t>
+              <a:t>26/10/2026</a:t>
             </a:fld>
             <a:endParaRPr lang="pt-BR"/>
           </a:p>
@@ -6413,7 +6413,7 @@
           <p:cNvPr id="6" name="Espaço Reservado para Rodapé 5">
             <a:extLst>
               <a:ext uri="{FF2B5EF4-FFF2-40B4-BE49-F238E27FC236}">
-                <a16:creationId xmlns:a16="http://schemas.microsoft.com/office/drawing/2014/main" xmlns="" id="{9BDDF6A5-A2E3-42EA-AC20-8628984DE29F}"/>
+                <a16:creationId xmlns="" xmlns:a16="http://schemas.microsoft.com/office/drawing/2014/main" id="{9BDDF6A5-A2E3-42EA-AC20-8628984DE29F}"/>
               </a:ext>
             </a:extLst>
           </p:cNvPr>
@@ -6438,7 +6438,7 @@
           <p:cNvPr id="7" name="Espaço Reservado para Número de Slide 6">
             <a:extLst>
               <a:ext uri="{FF2B5EF4-FFF2-40B4-BE49-F238E27FC236}">
-                <a16:creationId xmlns:a16="http://schemas.microsoft.com/office/drawing/2014/main" xmlns="" id="{CD0E8ED9-0335-4E8E-B1F3-9FB730CC5D44}"/>
+                <a16:creationId xmlns="" xmlns:a16="http://schemas.microsoft.com/office/drawing/2014/main" id="{CD0E8ED9-0335-4E8E-B1F3-9FB730CC5D44}"/>
               </a:ext>
             </a:extLst>
           </p:cNvPr>
@@ -6502,7 +6502,7 @@
           <p:cNvPr id="2" name="Espaço Reservado para Título 1">
             <a:extLst>
               <a:ext uri="{FF2B5EF4-FFF2-40B4-BE49-F238E27FC236}">
-                <a16:creationId xmlns:a16="http://schemas.microsoft.com/office/drawing/2014/main" xmlns="" id="{0A8935E9-951F-47C4-9BDF-95A3A88D0788}"/>
+                <a16:creationId xmlns="" xmlns:a16="http://schemas.microsoft.com/office/drawing/2014/main" id="{0A8935E9-951F-47C4-9BDF-95A3A88D0788}"/>
               </a:ext>
             </a:extLst>
           </p:cNvPr>
@@ -6540,7 +6540,7 @@
           <p:cNvPr id="3" name="Espaço Reservado para Texto 2">
             <a:extLst>
               <a:ext uri="{FF2B5EF4-FFF2-40B4-BE49-F238E27FC236}">
-                <a16:creationId xmlns:a16="http://schemas.microsoft.com/office/drawing/2014/main" xmlns="" id="{E593D208-98C1-477F-BDD7-9590CAABD8E1}"/>
+                <a16:creationId xmlns="" xmlns:a16="http://schemas.microsoft.com/office/drawing/2014/main" id="{E593D208-98C1-477F-BDD7-9590CAABD8E1}"/>
               </a:ext>
             </a:extLst>
           </p:cNvPr>
@@ -6607,7 +6607,7 @@
           <p:cNvPr id="4" name="Espaço Reservado para Data 3">
             <a:extLst>
               <a:ext uri="{FF2B5EF4-FFF2-40B4-BE49-F238E27FC236}">
-                <a16:creationId xmlns:a16="http://schemas.microsoft.com/office/drawing/2014/main" xmlns="" id="{B4E2E00F-9981-497B-A0C6-B0EC7B08A53B}"/>
+                <a16:creationId xmlns="" xmlns:a16="http://schemas.microsoft.com/office/drawing/2014/main" id="{B4E2E00F-9981-497B-A0C6-B0EC7B08A53B}"/>
               </a:ext>
             </a:extLst>
           </p:cNvPr>
@@ -6643,7 +6643,7 @@
           <a:p>
             <a:fld id="{DF13A7C9-E623-47E9-BF8C-18B1142F2EF1}" type="datetimeFigureOut">
               <a:rPr lang="pt-BR" smtClean="0"/>
-              <a:t>24/08/2026</a:t>
+              <a:t>26/10/2026</a:t>
             </a:fld>
             <a:endParaRPr lang="pt-BR"/>
           </a:p>
@@ -6654,7 +6654,7 @@
           <p:cNvPr id="5" name="Espaço Reservado para Rodapé 4">
             <a:extLst>
               <a:ext uri="{FF2B5EF4-FFF2-40B4-BE49-F238E27FC236}">
-                <a16:creationId xmlns:a16="http://schemas.microsoft.com/office/drawing/2014/main" xmlns="" id="{60BEC5A9-48D3-46DC-ADC1-F9058E792F69}"/>
+                <a16:creationId xmlns="" xmlns:a16="http://schemas.microsoft.com/office/drawing/2014/main" id="{60BEC5A9-48D3-46DC-ADC1-F9058E792F69}"/>
               </a:ext>
             </a:extLst>
           </p:cNvPr>
@@ -6697,7 +6697,7 @@
           <p:cNvPr id="6" name="Espaço Reservado para Número de Slide 5">
             <a:extLst>
               <a:ext uri="{FF2B5EF4-FFF2-40B4-BE49-F238E27FC236}">
-                <a16:creationId xmlns:a16="http://schemas.microsoft.com/office/drawing/2014/main" xmlns="" id="{D5E123F4-5E0B-4BC7-B58C-07337D3A9F00}"/>
+                <a16:creationId xmlns="" xmlns:a16="http://schemas.microsoft.com/office/drawing/2014/main" id="{D5E123F4-5E0B-4BC7-B58C-07337D3A9F00}"/>
               </a:ext>
             </a:extLst>
           </p:cNvPr>
@@ -7070,7 +7070,7 @@
           <p:cNvPr id="2" name="Espaço Reservado para Título 1">
             <a:extLst>
               <a:ext uri="{FF2B5EF4-FFF2-40B4-BE49-F238E27FC236}">
-                <a16:creationId xmlns="" xmlns:a16="http://schemas.microsoft.com/office/drawing/2014/main" id="{0A8935E9-951F-47C4-9BDF-95A3A88D0788}"/>
+                <a16:creationId xmlns:a16="http://schemas.microsoft.com/office/drawing/2014/main" xmlns="" id="{0A8935E9-951F-47C4-9BDF-95A3A88D0788}"/>
               </a:ext>
             </a:extLst>
           </p:cNvPr>
@@ -7108,7 +7108,7 @@
           <p:cNvPr id="3" name="Espaço Reservado para Texto 2">
             <a:extLst>
               <a:ext uri="{FF2B5EF4-FFF2-40B4-BE49-F238E27FC236}">
-                <a16:creationId xmlns="" xmlns:a16="http://schemas.microsoft.com/office/drawing/2014/main" id="{E593D208-98C1-477F-BDD7-9590CAABD8E1}"/>
+                <a16:creationId xmlns:a16="http://schemas.microsoft.com/office/drawing/2014/main" xmlns="" id="{E593D208-98C1-477F-BDD7-9590CAABD8E1}"/>
               </a:ext>
             </a:extLst>
           </p:cNvPr>
@@ -7175,7 +7175,7 @@
           <p:cNvPr id="4" name="Espaço Reservado para Data 3">
             <a:extLst>
               <a:ext uri="{FF2B5EF4-FFF2-40B4-BE49-F238E27FC236}">
-                <a16:creationId xmlns="" xmlns:a16="http://schemas.microsoft.com/office/drawing/2014/main" id="{B4E2E00F-9981-497B-A0C6-B0EC7B08A53B}"/>
+                <a16:creationId xmlns:a16="http://schemas.microsoft.com/office/drawing/2014/main" xmlns="" id="{B4E2E00F-9981-497B-A0C6-B0EC7B08A53B}"/>
               </a:ext>
             </a:extLst>
           </p:cNvPr>
@@ -7220,7 +7220,7 @@
                 <a:sym typeface="Arial"/>
               </a:rPr>
               <a:pPr/>
-              <a:t>24/08/2026</a:t>
+              <a:t>26/10/2026</a:t>
             </a:fld>
             <a:endParaRPr lang="pt-BR">
               <a:solidFill>
@@ -7239,7 +7239,7 @@
           <p:cNvPr id="5" name="Espaço Reservado para Rodapé 4">
             <a:extLst>
               <a:ext uri="{FF2B5EF4-FFF2-40B4-BE49-F238E27FC236}">
-                <a16:creationId xmlns="" xmlns:a16="http://schemas.microsoft.com/office/drawing/2014/main" id="{60BEC5A9-48D3-46DC-ADC1-F9058E792F69}"/>
+                <a16:creationId xmlns:a16="http://schemas.microsoft.com/office/drawing/2014/main" xmlns="" id="{60BEC5A9-48D3-46DC-ADC1-F9058E792F69}"/>
               </a:ext>
             </a:extLst>
           </p:cNvPr>
@@ -7290,7 +7290,7 @@
           <p:cNvPr id="6" name="Espaço Reservado para Número de Slide 5">
             <a:extLst>
               <a:ext uri="{FF2B5EF4-FFF2-40B4-BE49-F238E27FC236}">
-                <a16:creationId xmlns="" xmlns:a16="http://schemas.microsoft.com/office/drawing/2014/main" id="{D5E123F4-5E0B-4BC7-B58C-07337D3A9F00}"/>
+                <a16:creationId xmlns:a16="http://schemas.microsoft.com/office/drawing/2014/main" xmlns="" id="{D5E123F4-5E0B-4BC7-B58C-07337D3A9F00}"/>
               </a:ext>
             </a:extLst>
           </p:cNvPr>
@@ -7654,7 +7654,7 @@
 </file>
 
 <file path=ppt/slides/slide1.xml><?xml version="1.0" encoding="utf-8"?>
-<p:sld xmlns:a="http://schemas.openxmlformats.org/drawingml/2006/main" xmlns:p="http://schemas.openxmlformats.org/presentationml/2006/main" xmlns:r="http://schemas.openxmlformats.org/officeDocument/2006/relationships">
+<p:sld xmlns:a="http://schemas.openxmlformats.org/drawingml/2006/main" xmlns:r="http://schemas.openxmlformats.org/officeDocument/2006/relationships" xmlns:p="http://schemas.openxmlformats.org/presentationml/2006/main">
   <p:cSld>
     <p:spTree>
       <p:nvGrpSpPr>
@@ -7662,7 +7662,14 @@
         <p:cNvGrpSpPr/>
         <p:nvPr/>
       </p:nvGrpSpPr>
-      <p:grpSpPr/>
+      <p:grpSpPr>
+        <a:xfrm>
+          <a:off x="0" y="0"/>
+          <a:ext cx="0" cy="0"/>
+          <a:chOff x="0" y="0"/>
+          <a:chExt cx="0" cy="0"/>
+        </a:xfrm>
+      </p:grpSpPr>
       <p:pic>
         <p:nvPicPr>
           <p:cNvPr id="6" name="Imagem 5" descr="Interface gráfica do usuário, Texto, Aplicativo&#10;&#10;O conteúdo gerado por IA pode estar incorreto.">
@@ -7700,6 +7707,11 @@
         </p:spPr>
       </p:pic>
     </p:spTree>
+    <p:extLst>
+      <p:ext uri="{BB962C8B-B14F-4D97-AF65-F5344CB8AC3E}">
+        <p14:creationId xmlns:p14="http://schemas.microsoft.com/office/powerpoint/2010/main" val="1240068751"/>
+      </p:ext>
+    </p:extLst>
   </p:cSld>
   <p:clrMapOvr>
     <a:masterClrMapping/>
@@ -7708,7 +7720,7 @@
 </file>
 
 <file path=ppt/slides/slide2.xml><?xml version="1.0" encoding="utf-8"?>
-<p:sld xmlns:a="http://schemas.openxmlformats.org/drawingml/2006/main" xmlns:p="http://schemas.openxmlformats.org/presentationml/2006/main" xmlns:r="http://schemas.openxmlformats.org/officeDocument/2006/relationships">
+<p:sld xmlns:a="http://schemas.openxmlformats.org/drawingml/2006/main" xmlns:r="http://schemas.openxmlformats.org/officeDocument/2006/relationships" xmlns:p="http://schemas.openxmlformats.org/presentationml/2006/main">
   <p:cSld>
     <p:spTree>
       <p:nvGrpSpPr>
@@ -7716,13 +7728,141 @@
         <p:cNvGrpSpPr/>
         <p:nvPr/>
       </p:nvGrpSpPr>
-      <p:grpSpPr/>
+      <p:grpSpPr>
+        <a:xfrm>
+          <a:off x="0" y="0"/>
+          <a:ext cx="0" cy="0"/>
+          <a:chOff x="0" y="0"/>
+          <a:chExt cx="0" cy="0"/>
+        </a:xfrm>
+      </p:grpSpPr>
+      <p:pic>
+        <p:nvPicPr>
+          <p:cNvPr id="3" name="Imagem 2">
+            <a:extLst>
+              <a:ext uri="{FF2B5EF4-FFF2-40B4-BE49-F238E27FC236}">
+                <a16:creationId xmlns="" xmlns:a16="http://schemas.microsoft.com/office/drawing/2014/main" id="{925D8689-34D4-7601-EBC6-A79A9FEF662B}"/>
+              </a:ext>
+            </a:extLst>
+          </p:cNvPr>
+          <p:cNvPicPr>
+            <a:picLocks noChangeAspect="1"/>
+          </p:cNvPicPr>
+          <p:nvPr/>
+        </p:nvPicPr>
+        <p:blipFill>
+          <a:blip r:embed="rId2"/>
+          <a:srcRect t="1133"/>
+          <a:stretch>
+            <a:fillRect/>
+          </a:stretch>
+        </p:blipFill>
+        <p:spPr>
+          <a:xfrm>
+            <a:off x="0" y="0"/>
+            <a:ext cx="12188952" cy="6857998"/>
+          </a:xfrm>
+          <a:prstGeom prst="rect">
+            <a:avLst/>
+          </a:prstGeom>
+        </p:spPr>
+      </p:pic>
+    </p:spTree>
+    <p:extLst>
+      <p:ext uri="{BB962C8B-B14F-4D97-AF65-F5344CB8AC3E}">
+        <p14:creationId xmlns:p14="http://schemas.microsoft.com/office/powerpoint/2010/main" val="52810868"/>
+      </p:ext>
+    </p:extLst>
+  </p:cSld>
+  <p:clrMapOvr>
+    <a:masterClrMapping/>
+  </p:clrMapOvr>
+</p:sld>
+</file>
+
+<file path=ppt/slides/slide3.xml><?xml version="1.0" encoding="utf-8"?>
+<p:sld xmlns:a="http://schemas.openxmlformats.org/drawingml/2006/main" xmlns:r="http://schemas.openxmlformats.org/officeDocument/2006/relationships" xmlns:p="http://schemas.openxmlformats.org/presentationml/2006/main">
+  <p:cSld>
+    <p:spTree>
+      <p:nvGrpSpPr>
+        <p:cNvPr id="1" name=""/>
+        <p:cNvGrpSpPr/>
+        <p:nvPr/>
+      </p:nvGrpSpPr>
+      <p:grpSpPr>
+        <a:xfrm>
+          <a:off x="0" y="0"/>
+          <a:ext cx="0" cy="0"/>
+          <a:chOff x="0" y="0"/>
+          <a:chExt cx="0" cy="0"/>
+        </a:xfrm>
+      </p:grpSpPr>
       <p:pic>
         <p:nvPicPr>
           <p:cNvPr id="4" name="Imagem 3">
             <a:extLst>
               <a:ext uri="{FF2B5EF4-FFF2-40B4-BE49-F238E27FC236}">
-                <a16:creationId xmlns="" xmlns:a16="http://schemas.microsoft.com/office/drawing/2014/main" id="{1A93AA03-52FD-1726-44CB-24B243745A0C}"/>
+                <a16:creationId xmlns="" xmlns:a16="http://schemas.microsoft.com/office/drawing/2014/main" id="{CB70487A-9D6E-F168-A8DF-9F696F54DB11}"/>
+              </a:ext>
+            </a:extLst>
+          </p:cNvPr>
+          <p:cNvPicPr>
+            <a:picLocks noChangeAspect="1"/>
+          </p:cNvPicPr>
+          <p:nvPr/>
+        </p:nvPicPr>
+        <p:blipFill>
+          <a:blip r:embed="rId2"/>
+          <a:stretch>
+            <a:fillRect/>
+          </a:stretch>
+        </p:blipFill>
+        <p:spPr>
+          <a:xfrm>
+            <a:off x="0" y="4314"/>
+            <a:ext cx="12192000" cy="6826060"/>
+          </a:xfrm>
+          <a:prstGeom prst="rect">
+            <a:avLst/>
+          </a:prstGeom>
+        </p:spPr>
+      </p:pic>
+    </p:spTree>
+    <p:extLst>
+      <p:ext uri="{BB962C8B-B14F-4D97-AF65-F5344CB8AC3E}">
+        <p14:creationId xmlns:p14="http://schemas.microsoft.com/office/powerpoint/2010/main" val="4138300693"/>
+      </p:ext>
+    </p:extLst>
+  </p:cSld>
+  <p:clrMapOvr>
+    <a:masterClrMapping/>
+  </p:clrMapOvr>
+</p:sld>
+</file>
+
+<file path=ppt/slides/slide4.xml><?xml version="1.0" encoding="utf-8"?>
+<p:sld xmlns:a="http://schemas.openxmlformats.org/drawingml/2006/main" xmlns:r="http://schemas.openxmlformats.org/officeDocument/2006/relationships" xmlns:p="http://schemas.openxmlformats.org/presentationml/2006/main">
+  <p:cSld>
+    <p:spTree>
+      <p:nvGrpSpPr>
+        <p:cNvPr id="1" name=""/>
+        <p:cNvGrpSpPr/>
+        <p:nvPr/>
+      </p:nvGrpSpPr>
+      <p:grpSpPr>
+        <a:xfrm>
+          <a:off x="0" y="0"/>
+          <a:ext cx="0" cy="0"/>
+          <a:chOff x="0" y="0"/>
+          <a:chExt cx="0" cy="0"/>
+        </a:xfrm>
+      </p:grpSpPr>
+      <p:pic>
+        <p:nvPicPr>
+          <p:cNvPr id="2" name="Imagem 1" descr="Interface gráfica do usuário, Texto&#10;&#10;Descrição gerada automaticamente">
+            <a:extLst>
+              <a:ext uri="{FF2B5EF4-FFF2-40B4-BE49-F238E27FC236}">
+                <a16:creationId xmlns="" xmlns:a16="http://schemas.microsoft.com/office/drawing/2014/main" id="{05AC8714-2595-383E-01AD-62EBDED2D174}"/>
               </a:ext>
             </a:extLst>
           </p:cNvPr>
@@ -7754,6 +7894,11 @@
         </p:spPr>
       </p:pic>
     </p:spTree>
+    <p:extLst>
+      <p:ext uri="{BB962C8B-B14F-4D97-AF65-F5344CB8AC3E}">
+        <p14:creationId xmlns:p14="http://schemas.microsoft.com/office/powerpoint/2010/main" val="2163456521"/>
+      </p:ext>
+    </p:extLst>
   </p:cSld>
   <p:clrMapOvr>
     <a:masterClrMapping/>
@@ -7761,8 +7906,8 @@
 </p:sld>
 </file>
 
-<file path=ppt/slides/slide3.xml><?xml version="1.0" encoding="utf-8"?>
-<p:sld xmlns:a="http://schemas.openxmlformats.org/drawingml/2006/main" xmlns:p="http://schemas.openxmlformats.org/presentationml/2006/main" xmlns:r="http://schemas.openxmlformats.org/officeDocument/2006/relationships">
+<file path=ppt/slides/slide5.xml><?xml version="1.0" encoding="utf-8"?>
+<p:sld xmlns:a="http://schemas.openxmlformats.org/drawingml/2006/main" xmlns:r="http://schemas.openxmlformats.org/officeDocument/2006/relationships" xmlns:p="http://schemas.openxmlformats.org/presentationml/2006/main">
   <p:cSld>
     <p:spTree>
       <p:nvGrpSpPr>
@@ -7770,13 +7915,20 @@
         <p:cNvGrpSpPr/>
         <p:nvPr/>
       </p:nvGrpSpPr>
-      <p:grpSpPr/>
+      <p:grpSpPr>
+        <a:xfrm>
+          <a:off x="0" y="0"/>
+          <a:ext cx="0" cy="0"/>
+          <a:chOff x="0" y="0"/>
+          <a:chExt cx="0" cy="0"/>
+        </a:xfrm>
+      </p:grpSpPr>
       <p:pic>
         <p:nvPicPr>
-          <p:cNvPr id="2" name="Imagem 1" descr="Texto&#10;&#10;O conteúdo gerado por IA pode estar incorreto.">
-            <a:extLst>
-              <a:ext uri="{FF2B5EF4-FFF2-40B4-BE49-F238E27FC236}">
-                <a16:creationId xmlns="" xmlns:a16="http://schemas.microsoft.com/office/drawing/2014/main" id="{3B83098A-03A3-A4F7-7FA9-2316BA2063CE}"/>
+          <p:cNvPr id="3" name="Imagem 2" descr="Interface gráfica do usuário, Aplicativo&#10;&#10;Descrição gerada automaticamente">
+            <a:extLst>
+              <a:ext uri="{FF2B5EF4-FFF2-40B4-BE49-F238E27FC236}">
+                <a16:creationId xmlns="" xmlns:a16="http://schemas.microsoft.com/office/drawing/2014/main" id="{009AB57B-1832-9210-0401-E80F5E463038}"/>
               </a:ext>
             </a:extLst>
           </p:cNvPr>
@@ -7808,6 +7960,11 @@
         </p:spPr>
       </p:pic>
     </p:spTree>
+    <p:extLst>
+      <p:ext uri="{BB962C8B-B14F-4D97-AF65-F5344CB8AC3E}">
+        <p14:creationId xmlns:p14="http://schemas.microsoft.com/office/powerpoint/2010/main" val="3521673787"/>
+      </p:ext>
+    </p:extLst>
   </p:cSld>
   <p:clrMapOvr>
     <a:masterClrMapping/>
@@ -7815,8 +7972,8 @@
 </p:sld>
 </file>
 
-<file path=ppt/slides/slide4.xml><?xml version="1.0" encoding="utf-8"?>
-<p:sld xmlns:a="http://schemas.openxmlformats.org/drawingml/2006/main" xmlns:p="http://schemas.openxmlformats.org/presentationml/2006/main" xmlns:r="http://schemas.openxmlformats.org/officeDocument/2006/relationships">
+<file path=ppt/slides/slide6.xml><?xml version="1.0" encoding="utf-8"?>
+<p:sld xmlns:a="http://schemas.openxmlformats.org/drawingml/2006/main" xmlns:r="http://schemas.openxmlformats.org/officeDocument/2006/relationships" xmlns:p="http://schemas.openxmlformats.org/presentationml/2006/main">
   <p:cSld>
     <p:spTree>
       <p:nvGrpSpPr>
@@ -7824,13 +7981,20 @@
         <p:cNvGrpSpPr/>
         <p:nvPr/>
       </p:nvGrpSpPr>
-      <p:grpSpPr/>
+      <p:grpSpPr>
+        <a:xfrm>
+          <a:off x="0" y="0"/>
+          <a:ext cx="0" cy="0"/>
+          <a:chOff x="0" y="0"/>
+          <a:chExt cx="0" cy="0"/>
+        </a:xfrm>
+      </p:grpSpPr>
       <p:pic>
         <p:nvPicPr>
-          <p:cNvPr id="2" name="Imagem 1" descr="Interface gráfica do usuário, Texto&#10;&#10;Descrição gerada automaticamente">
-            <a:extLst>
-              <a:ext uri="{FF2B5EF4-FFF2-40B4-BE49-F238E27FC236}">
-                <a16:creationId xmlns="" xmlns:a16="http://schemas.microsoft.com/office/drawing/2014/main" id="{05AC8714-2595-383E-01AD-62EBDED2D174}"/>
+          <p:cNvPr id="8" name="Imagem 7" descr="Interface gráfica do usuário, Texto&#10;&#10;Descrição gerada automaticamente">
+            <a:extLst>
+              <a:ext uri="{FF2B5EF4-FFF2-40B4-BE49-F238E27FC236}">
+                <a16:creationId xmlns="" xmlns:a16="http://schemas.microsoft.com/office/drawing/2014/main" id="{08DC7FB7-A579-3C6C-7EA8-C534B2378AA9}"/>
               </a:ext>
             </a:extLst>
           </p:cNvPr>
@@ -7862,114 +8026,11 @@
         </p:spPr>
       </p:pic>
     </p:spTree>
-  </p:cSld>
-  <p:clrMapOvr>
-    <a:masterClrMapping/>
-  </p:clrMapOvr>
-</p:sld>
-</file>
-
-<file path=ppt/slides/slide5.xml><?xml version="1.0" encoding="utf-8"?>
-<p:sld xmlns:a="http://schemas.openxmlformats.org/drawingml/2006/main" xmlns:p="http://schemas.openxmlformats.org/presentationml/2006/main" xmlns:r="http://schemas.openxmlformats.org/officeDocument/2006/relationships">
-  <p:cSld>
-    <p:spTree>
-      <p:nvGrpSpPr>
-        <p:cNvPr id="1" name=""/>
-        <p:cNvGrpSpPr/>
-        <p:nvPr/>
-      </p:nvGrpSpPr>
-      <p:grpSpPr/>
-      <p:pic>
-        <p:nvPicPr>
-          <p:cNvPr id="3" name="Imagem 2" descr="Interface gráfica do usuário, Aplicativo&#10;&#10;Descrição gerada automaticamente">
-            <a:extLst>
-              <a:ext uri="{FF2B5EF4-FFF2-40B4-BE49-F238E27FC236}">
-                <a16:creationId xmlns="" xmlns:a16="http://schemas.microsoft.com/office/drawing/2014/main" id="{009AB57B-1832-9210-0401-E80F5E463038}"/>
-              </a:ext>
-            </a:extLst>
-          </p:cNvPr>
-          <p:cNvPicPr>
-            <a:picLocks noChangeAspect="1"/>
-          </p:cNvPicPr>
-          <p:nvPr/>
-        </p:nvPicPr>
-        <p:blipFill>
-          <a:blip r:embed="rId2">
-            <a:extLst>
-              <a:ext uri="{28A0092B-C50C-407E-A947-70E740481C1C}">
-                <a14:useLocalDpi xmlns:a14="http://schemas.microsoft.com/office/drawing/2010/main" val="0"/>
-              </a:ext>
-            </a:extLst>
-          </a:blip>
-          <a:stretch>
-            <a:fillRect/>
-          </a:stretch>
-        </p:blipFill>
-        <p:spPr>
-          <a:xfrm>
-            <a:off x="0" y="0"/>
-            <a:ext cx="12192000" cy="6858000"/>
-          </a:xfrm>
-          <a:prstGeom prst="rect">
-            <a:avLst/>
-          </a:prstGeom>
-        </p:spPr>
-      </p:pic>
-    </p:spTree>
-  </p:cSld>
-  <p:clrMapOvr>
-    <a:masterClrMapping/>
-  </p:clrMapOvr>
-</p:sld>
-</file>
-
-<file path=ppt/slides/slide6.xml><?xml version="1.0" encoding="utf-8"?>
-<p:sld xmlns:a="http://schemas.openxmlformats.org/drawingml/2006/main" xmlns:p="http://schemas.openxmlformats.org/presentationml/2006/main" xmlns:r="http://schemas.openxmlformats.org/officeDocument/2006/relationships">
-  <p:cSld>
-    <p:spTree>
-      <p:nvGrpSpPr>
-        <p:cNvPr id="1" name=""/>
-        <p:cNvGrpSpPr/>
-        <p:nvPr/>
-      </p:nvGrpSpPr>
-      <p:grpSpPr/>
-      <p:pic>
-        <p:nvPicPr>
-          <p:cNvPr id="8" name="Imagem 7" descr="Interface gráfica do usuário, Texto&#10;&#10;Descrição gerada automaticamente">
-            <a:extLst>
-              <a:ext uri="{FF2B5EF4-FFF2-40B4-BE49-F238E27FC236}">
-                <a16:creationId xmlns="" xmlns:a16="http://schemas.microsoft.com/office/drawing/2014/main" id="{08DC7FB7-A579-3C6C-7EA8-C534B2378AA9}"/>
-              </a:ext>
-            </a:extLst>
-          </p:cNvPr>
-          <p:cNvPicPr>
-            <a:picLocks noChangeAspect="1"/>
-          </p:cNvPicPr>
-          <p:nvPr/>
-        </p:nvPicPr>
-        <p:blipFill>
-          <a:blip r:embed="rId2">
-            <a:extLst>
-              <a:ext uri="{28A0092B-C50C-407E-A947-70E740481C1C}">
-                <a14:useLocalDpi xmlns:a14="http://schemas.microsoft.com/office/drawing/2010/main" val="0"/>
-              </a:ext>
-            </a:extLst>
-          </a:blip>
-          <a:stretch>
-            <a:fillRect/>
-          </a:stretch>
-        </p:blipFill>
-        <p:spPr>
-          <a:xfrm>
-            <a:off x="0" y="0"/>
-            <a:ext cx="12192000" cy="6858000"/>
-          </a:xfrm>
-          <a:prstGeom prst="rect">
-            <a:avLst/>
-          </a:prstGeom>
-        </p:spPr>
-      </p:pic>
-    </p:spTree>
+    <p:extLst>
+      <p:ext uri="{BB962C8B-B14F-4D97-AF65-F5344CB8AC3E}">
+        <p14:creationId xmlns:p14="http://schemas.microsoft.com/office/powerpoint/2010/main" val="2578700809"/>
+      </p:ext>
+    </p:extLst>
   </p:cSld>
   <p:clrMapOvr>
     <a:masterClrMapping/>
@@ -7978,7 +8039,7 @@
 </file>
 
 <file path=ppt/slides/slide7.xml><?xml version="1.0" encoding="utf-8"?>
-<p:sld xmlns:a="http://schemas.openxmlformats.org/drawingml/2006/main" xmlns:p="http://schemas.openxmlformats.org/presentationml/2006/main" xmlns:r="http://schemas.openxmlformats.org/officeDocument/2006/relationships">
+<p:sld xmlns:a="http://schemas.openxmlformats.org/drawingml/2006/main" xmlns:r="http://schemas.openxmlformats.org/officeDocument/2006/relationships" xmlns:p="http://schemas.openxmlformats.org/presentationml/2006/main">
   <p:cSld>
     <p:spTree>
       <p:nvGrpSpPr>
@@ -7986,7 +8047,14 @@
         <p:cNvGrpSpPr/>
         <p:nvPr/>
       </p:nvGrpSpPr>
-      <p:grpSpPr/>
+      <p:grpSpPr>
+        <a:xfrm>
+          <a:off x="0" y="0"/>
+          <a:ext cx="0" cy="0"/>
+          <a:chOff x="0" y="0"/>
+          <a:chExt cx="0" cy="0"/>
+        </a:xfrm>
+      </p:grpSpPr>
       <p:sp>
         <p:nvSpPr>
           <p:cNvPr id="13" name="Retângulo: Cantos Arredondados 12">
@@ -8031,30 +8099,74 @@
           <a:bodyPr rtlCol="0" anchor="ctr"/>
           <a:lstStyle/>
           <a:p>
-            <a:pPr algn="ctr">
+            <a:pPr marL="0" marR="0" lvl="0" indent="0" algn="ctr" defTabSz="914400" rtl="0" eaLnBrk="1" fontAlgn="auto" latinLnBrk="0" hangingPunct="1">
+              <a:lnSpc>
+                <a:spcPct val="100000"/>
+              </a:lnSpc>
+              <a:spcBef>
+                <a:spcPts val="0"/>
+              </a:spcBef>
+              <a:spcAft>
+                <a:spcPts val="0"/>
+              </a:spcAft>
+              <a:buClrTx/>
+              <a:buSzTx/>
+              <a:buFontTx/>
+              <a:buNone/>
+              <a:tabLst/>
               <a:defRPr/>
             </a:pPr>
             <a:r>
-              <a:rPr lang="pt-BR" sz="3200" dirty="0">
+              <a:rPr kumimoji="0" lang="pt-BR" sz="3200" b="0" i="0" u="none" strike="noStrike" kern="1200" cap="none" spc="0" normalizeH="0" baseline="0" noProof="0" dirty="0">
+                <a:ln>
+                  <a:noFill/>
+                </a:ln>
                 <a:solidFill>
                   <a:prstClr val="white"/>
                 </a:solidFill>
+                <a:effectLst/>
+                <a:uLnTx/>
+                <a:uFillTx/>
                 <a:latin typeface="Georgia" panose="02040502050405020303" pitchFamily="18" charset="0"/>
+                <a:ea typeface="+mn-ea"/>
+                <a:cs typeface="+mn-cs"/>
                 <a:sym typeface="Arial"/>
               </a:rPr>
               <a:t>Milhares de professores da EBD tem usado nossos slides</a:t>
             </a:r>
           </a:p>
           <a:p>
-            <a:pPr algn="ctr">
+            <a:pPr marL="0" marR="0" lvl="0" indent="0" algn="ctr" defTabSz="914400" rtl="0" eaLnBrk="1" fontAlgn="auto" latinLnBrk="0" hangingPunct="1">
+              <a:lnSpc>
+                <a:spcPct val="100000"/>
+              </a:lnSpc>
+              <a:spcBef>
+                <a:spcPts val="0"/>
+              </a:spcBef>
+              <a:spcAft>
+                <a:spcPts val="0"/>
+              </a:spcAft>
+              <a:buClrTx/>
+              <a:buSzTx/>
+              <a:buFontTx/>
+              <a:buNone/>
+              <a:tabLst/>
               <a:defRPr/>
             </a:pPr>
             <a:r>
-              <a:rPr lang="pt-BR" sz="3200" i="1" dirty="0">
+              <a:rPr kumimoji="0" lang="pt-BR" sz="3200" b="0" i="1" u="none" strike="noStrike" kern="1200" cap="none" spc="0" normalizeH="0" baseline="0" noProof="0" dirty="0">
+                <a:ln>
+                  <a:noFill/>
+                </a:ln>
                 <a:solidFill>
                   <a:prstClr val="white"/>
                 </a:solidFill>
+                <a:effectLst/>
+                <a:uLnTx/>
+                <a:uFillTx/>
                 <a:latin typeface="Georgia" panose="02040502050405020303" pitchFamily="18" charset="0"/>
+                <a:ea typeface="+mn-ea"/>
+                <a:cs typeface="+mn-cs"/>
                 <a:sym typeface="Arial"/>
               </a:rPr>
               <a:t>Faça parte desse grupo</a:t>
@@ -8099,6 +8211,11 @@
         </p:spPr>
       </p:pic>
     </p:spTree>
+    <p:extLst>
+      <p:ext uri="{BB962C8B-B14F-4D97-AF65-F5344CB8AC3E}">
+        <p14:creationId xmlns:p14="http://schemas.microsoft.com/office/powerpoint/2010/main" val="499398338"/>
+      </p:ext>
+    </p:extLst>
   </p:cSld>
   <p:clrMapOvr>
     <a:masterClrMapping/>
@@ -8107,7 +8224,7 @@
 </file>
 
 <file path=ppt/slides/slide8.xml><?xml version="1.0" encoding="utf-8"?>
-<p:sld xmlns:a="http://schemas.openxmlformats.org/drawingml/2006/main" xmlns:p="http://schemas.openxmlformats.org/presentationml/2006/main" xmlns:r="http://schemas.openxmlformats.org/officeDocument/2006/relationships">
+<p:sld xmlns:a="http://schemas.openxmlformats.org/drawingml/2006/main" xmlns:r="http://schemas.openxmlformats.org/officeDocument/2006/relationships" xmlns:p="http://schemas.openxmlformats.org/presentationml/2006/main">
   <p:cSld>
     <p:spTree>
       <p:nvGrpSpPr>
@@ -8115,7 +8232,14 @@
         <p:cNvGrpSpPr/>
         <p:nvPr/>
       </p:nvGrpSpPr>
-      <p:grpSpPr/>
+      <p:grpSpPr>
+        <a:xfrm>
+          <a:off x="0" y="0"/>
+          <a:ext cx="0" cy="0"/>
+          <a:chOff x="0" y="0"/>
+          <a:chExt cx="0" cy="0"/>
+        </a:xfrm>
+      </p:grpSpPr>
       <p:pic>
         <p:nvPicPr>
           <p:cNvPr id="3" name="Imagem 2">
@@ -8153,6 +8277,11 @@
         </p:spPr>
       </p:pic>
     </p:spTree>
+    <p:extLst>
+      <p:ext uri="{BB962C8B-B14F-4D97-AF65-F5344CB8AC3E}">
+        <p14:creationId xmlns:p14="http://schemas.microsoft.com/office/powerpoint/2010/main" val="1636293347"/>
+      </p:ext>
+    </p:extLst>
   </p:cSld>
   <p:clrMapOvr>
     <a:masterClrMapping/>
@@ -8161,7 +8290,7 @@
 </file>
 
 <file path=ppt/slides/slide9.xml><?xml version="1.0" encoding="utf-8"?>
-<p:sld xmlns:a="http://schemas.openxmlformats.org/drawingml/2006/main" xmlns:p="http://schemas.openxmlformats.org/presentationml/2006/main" xmlns:r="http://schemas.openxmlformats.org/officeDocument/2006/relationships">
+<p:sld xmlns:a="http://schemas.openxmlformats.org/drawingml/2006/main" xmlns:r="http://schemas.openxmlformats.org/officeDocument/2006/relationships" xmlns:p="http://schemas.openxmlformats.org/presentationml/2006/main">
   <p:cSld>
     <p:spTree>
       <p:nvGrpSpPr>
@@ -8169,7 +8298,14 @@
         <p:cNvGrpSpPr/>
         <p:nvPr/>
       </p:nvGrpSpPr>
-      <p:grpSpPr/>
+      <p:grpSpPr>
+        <a:xfrm>
+          <a:off x="0" y="0"/>
+          <a:ext cx="0" cy="0"/>
+          <a:chOff x="0" y="0"/>
+          <a:chExt cx="0" cy="0"/>
+        </a:xfrm>
+      </p:grpSpPr>
       <p:sp>
         <p:nvSpPr>
           <p:cNvPr id="2" name="Título 1">
@@ -8183,7 +8319,7 @@
             <a:spLocks noGrp="1"/>
           </p:cNvSpPr>
           <p:nvPr>
-            <p:ph type="title"/>
+            <p:ph type="title" idx="4294967295"/>
           </p:nvPr>
         </p:nvSpPr>
         <p:spPr>
@@ -8281,6 +8417,11 @@
         </p:spPr>
       </p:pic>
     </p:spTree>
+    <p:extLst>
+      <p:ext uri="{BB962C8B-B14F-4D97-AF65-F5344CB8AC3E}">
+        <p14:creationId xmlns:p14="http://schemas.microsoft.com/office/powerpoint/2010/main" val="1026531725"/>
+      </p:ext>
+    </p:extLst>
   </p:cSld>
   <p:clrMapOvr>
     <a:masterClrMapping/>
